--- a/Slides/DirectMessenger.pptx
+++ b/Slides/DirectMessenger.pptx
@@ -2,8 +2,11 @@
 <file path=ppt/presentation.xml><?xml version="1.0" encoding="utf-8"?>
 <p:presentation xmlns:a="http://schemas.openxmlformats.org/drawingml/2006/main" xmlns:r="http://schemas.openxmlformats.org/officeDocument/2006/relationships" xmlns:p="http://schemas.openxmlformats.org/presentationml/2006/main" saveSubsetFonts="1" autoCompressPictures="0">
   <p:sldMasterIdLst>
-    <p:sldMasterId id="2147483660" r:id="rId1"/>
+    <p:sldMasterId id="2147483670" r:id="rId1"/>
   </p:sldMasterIdLst>
+  <p:notesMasterIdLst>
+    <p:notesMasterId r:id="rId6"/>
+  </p:notesMasterIdLst>
   <p:sldIdLst>
     <p:sldId id="256" r:id="rId2"/>
     <p:sldId id="257" r:id="rId3"/>
@@ -115,6 +118,355 @@
 </p:presentation>
 </file>
 
+<file path=ppt/notesMasters/notesMaster1.xml><?xml version="1.0" encoding="utf-8"?>
+<p:notesMaster xmlns:a="http://schemas.openxmlformats.org/drawingml/2006/main" xmlns:r="http://schemas.openxmlformats.org/officeDocument/2006/relationships" xmlns:p="http://schemas.openxmlformats.org/presentationml/2006/main">
+  <p:cSld>
+    <p:bg>
+      <p:bgRef idx="1001">
+        <a:schemeClr val="bg1"/>
+      </p:bgRef>
+    </p:bg>
+    <p:spTree>
+      <p:nvGrpSpPr>
+        <p:cNvPr id="1" name=""/>
+        <p:cNvGrpSpPr/>
+        <p:nvPr/>
+      </p:nvGrpSpPr>
+      <p:grpSpPr>
+        <a:xfrm>
+          <a:off x="0" y="0"/>
+          <a:ext cx="0" cy="0"/>
+          <a:chOff x="0" y="0"/>
+          <a:chExt cx="0" cy="0"/>
+        </a:xfrm>
+      </p:grpSpPr>
+      <p:sp>
+        <p:nvSpPr>
+          <p:cNvPr id="2" name="Header Placeholder 1"/>
+          <p:cNvSpPr>
+            <a:spLocks noGrp="1"/>
+          </p:cNvSpPr>
+          <p:nvPr>
+            <p:ph type="hdr" sz="quarter"/>
+          </p:nvPr>
+        </p:nvSpPr>
+        <p:spPr>
+          <a:xfrm>
+            <a:off x="0" y="0"/>
+            <a:ext cx="2971800" cy="458788"/>
+          </a:xfrm>
+          <a:prstGeom prst="rect">
+            <a:avLst/>
+          </a:prstGeom>
+        </p:spPr>
+        <p:txBody>
+          <a:bodyPr vert="horz" lIns="91440" tIns="45720" rIns="91440" bIns="45720" rtlCol="0"/>
+          <a:lstStyle>
+            <a:lvl1pPr algn="l">
+              <a:defRPr sz="1200"/>
+            </a:lvl1pPr>
+          </a:lstStyle>
+          <a:p>
+            <a:endParaRPr lang="en-US"/>
+          </a:p>
+        </p:txBody>
+      </p:sp>
+      <p:sp>
+        <p:nvSpPr>
+          <p:cNvPr id="3" name="Date Placeholder 2"/>
+          <p:cNvSpPr>
+            <a:spLocks noGrp="1"/>
+          </p:cNvSpPr>
+          <p:nvPr>
+            <p:ph type="dt" idx="1"/>
+          </p:nvPr>
+        </p:nvSpPr>
+        <p:spPr>
+          <a:xfrm>
+            <a:off x="3884613" y="0"/>
+            <a:ext cx="2971800" cy="458788"/>
+          </a:xfrm>
+          <a:prstGeom prst="rect">
+            <a:avLst/>
+          </a:prstGeom>
+        </p:spPr>
+        <p:txBody>
+          <a:bodyPr vert="horz" lIns="91440" tIns="45720" rIns="91440" bIns="45720" rtlCol="0"/>
+          <a:lstStyle>
+            <a:lvl1pPr algn="r">
+              <a:defRPr sz="1200"/>
+            </a:lvl1pPr>
+          </a:lstStyle>
+          <a:p>
+            <a:fld id="{370A4D88-7C19-9749-8F05-3BE5A1914FCE}" type="datetimeFigureOut">
+              <a:rPr lang="en-US" smtClean="0"/>
+              <a:t>10/8/26</a:t>
+            </a:fld>
+            <a:endParaRPr lang="en-US"/>
+          </a:p>
+        </p:txBody>
+      </p:sp>
+      <p:sp>
+        <p:nvSpPr>
+          <p:cNvPr id="4" name="Slide Image Placeholder 3"/>
+          <p:cNvSpPr>
+            <a:spLocks noGrp="1" noRot="1" noChangeAspect="1"/>
+          </p:cNvSpPr>
+          <p:nvPr>
+            <p:ph type="sldImg" idx="2"/>
+          </p:nvPr>
+        </p:nvSpPr>
+        <p:spPr>
+          <a:xfrm>
+            <a:off x="685800" y="1143000"/>
+            <a:ext cx="5486400" cy="3086100"/>
+          </a:xfrm>
+          <a:prstGeom prst="rect">
+            <a:avLst/>
+          </a:prstGeom>
+          <a:noFill/>
+          <a:ln w="12700">
+            <a:solidFill>
+              <a:prstClr val="black"/>
+            </a:solidFill>
+          </a:ln>
+        </p:spPr>
+        <p:txBody>
+          <a:bodyPr vert="horz" lIns="91440" tIns="45720" rIns="91440" bIns="45720" rtlCol="0" anchor="ctr"/>
+          <a:lstStyle/>
+          <a:p>
+            <a:endParaRPr lang="en-US"/>
+          </a:p>
+        </p:txBody>
+      </p:sp>
+      <p:sp>
+        <p:nvSpPr>
+          <p:cNvPr id="5" name="Notes Placeholder 4"/>
+          <p:cNvSpPr>
+            <a:spLocks noGrp="1"/>
+          </p:cNvSpPr>
+          <p:nvPr>
+            <p:ph type="body" sz="quarter" idx="3"/>
+          </p:nvPr>
+        </p:nvSpPr>
+        <p:spPr>
+          <a:xfrm>
+            <a:off x="685800" y="4400550"/>
+            <a:ext cx="5486400" cy="3600450"/>
+          </a:xfrm>
+          <a:prstGeom prst="rect">
+            <a:avLst/>
+          </a:prstGeom>
+        </p:spPr>
+        <p:txBody>
+          <a:bodyPr vert="horz" lIns="91440" tIns="45720" rIns="91440" bIns="45720" rtlCol="0"/>
+          <a:lstStyle/>
+          <a:p>
+            <a:pPr lvl="0"/>
+            <a:r>
+              <a:rPr lang="en-US"/>
+              <a:t>Click to edit Master text styles</a:t>
+            </a:r>
+          </a:p>
+          <a:p>
+            <a:pPr lvl="1"/>
+            <a:r>
+              <a:rPr lang="en-US"/>
+              <a:t>Second level</a:t>
+            </a:r>
+          </a:p>
+          <a:p>
+            <a:pPr lvl="2"/>
+            <a:r>
+              <a:rPr lang="en-US"/>
+              <a:t>Third level</a:t>
+            </a:r>
+          </a:p>
+          <a:p>
+            <a:pPr lvl="3"/>
+            <a:r>
+              <a:rPr lang="en-US"/>
+              <a:t>Fourth level</a:t>
+            </a:r>
+          </a:p>
+          <a:p>
+            <a:pPr lvl="4"/>
+            <a:r>
+              <a:rPr lang="en-US"/>
+              <a:t>Fifth level</a:t>
+            </a:r>
+          </a:p>
+        </p:txBody>
+      </p:sp>
+      <p:sp>
+        <p:nvSpPr>
+          <p:cNvPr id="6" name="Footer Placeholder 5"/>
+          <p:cNvSpPr>
+            <a:spLocks noGrp="1"/>
+          </p:cNvSpPr>
+          <p:nvPr>
+            <p:ph type="ftr" sz="quarter" idx="4"/>
+          </p:nvPr>
+        </p:nvSpPr>
+        <p:spPr>
+          <a:xfrm>
+            <a:off x="0" y="8685213"/>
+            <a:ext cx="2971800" cy="458787"/>
+          </a:xfrm>
+          <a:prstGeom prst="rect">
+            <a:avLst/>
+          </a:prstGeom>
+        </p:spPr>
+        <p:txBody>
+          <a:bodyPr vert="horz" lIns="91440" tIns="45720" rIns="91440" bIns="45720" rtlCol="0" anchor="b"/>
+          <a:lstStyle>
+            <a:lvl1pPr algn="l">
+              <a:defRPr sz="1200"/>
+            </a:lvl1pPr>
+          </a:lstStyle>
+          <a:p>
+            <a:endParaRPr lang="en-US"/>
+          </a:p>
+        </p:txBody>
+      </p:sp>
+      <p:sp>
+        <p:nvSpPr>
+          <p:cNvPr id="7" name="Slide Number Placeholder 6"/>
+          <p:cNvSpPr>
+            <a:spLocks noGrp="1"/>
+          </p:cNvSpPr>
+          <p:nvPr>
+            <p:ph type="sldNum" sz="quarter" idx="5"/>
+          </p:nvPr>
+        </p:nvSpPr>
+        <p:spPr>
+          <a:xfrm>
+            <a:off x="3884613" y="8685213"/>
+            <a:ext cx="2971800" cy="458787"/>
+          </a:xfrm>
+          <a:prstGeom prst="rect">
+            <a:avLst/>
+          </a:prstGeom>
+        </p:spPr>
+        <p:txBody>
+          <a:bodyPr vert="horz" lIns="91440" tIns="45720" rIns="91440" bIns="45720" rtlCol="0" anchor="b"/>
+          <a:lstStyle>
+            <a:lvl1pPr algn="r">
+              <a:defRPr sz="1200"/>
+            </a:lvl1pPr>
+          </a:lstStyle>
+          <a:p>
+            <a:fld id="{360F6913-7F3F-C142-B506-2DB09397FD72}" type="slidenum">
+              <a:rPr lang="en-US" smtClean="0"/>
+              <a:t>‹#›</a:t>
+            </a:fld>
+            <a:endParaRPr lang="en-US"/>
+          </a:p>
+        </p:txBody>
+      </p:sp>
+    </p:spTree>
+    <p:extLst>
+      <p:ext uri="{BB962C8B-B14F-4D97-AF65-F5344CB8AC3E}">
+        <p14:creationId xmlns:p14="http://schemas.microsoft.com/office/powerpoint/2010/main" val="251409057"/>
+      </p:ext>
+    </p:extLst>
+  </p:cSld>
+  <p:clrMap bg1="lt1" tx1="dk1" bg2="lt2" tx2="dk2" accent1="accent1" accent2="accent2" accent3="accent3" accent4="accent4" accent5="accent5" accent6="accent6" hlink="hlink" folHlink="folHlink"/>
+  <p:notesStyle>
+    <a:lvl1pPr marL="0" algn="l" defTabSz="914400" rtl="0" eaLnBrk="1" latinLnBrk="0" hangingPunct="1">
+      <a:defRPr sz="1200" kern="1200">
+        <a:solidFill>
+          <a:schemeClr val="tx1"/>
+        </a:solidFill>
+        <a:latin typeface="+mn-lt"/>
+        <a:ea typeface="+mn-ea"/>
+        <a:cs typeface="+mn-cs"/>
+      </a:defRPr>
+    </a:lvl1pPr>
+    <a:lvl2pPr marL="457200" algn="l" defTabSz="914400" rtl="0" eaLnBrk="1" latinLnBrk="0" hangingPunct="1">
+      <a:defRPr sz="1200" kern="1200">
+        <a:solidFill>
+          <a:schemeClr val="tx1"/>
+        </a:solidFill>
+        <a:latin typeface="+mn-lt"/>
+        <a:ea typeface="+mn-ea"/>
+        <a:cs typeface="+mn-cs"/>
+      </a:defRPr>
+    </a:lvl2pPr>
+    <a:lvl3pPr marL="914400" algn="l" defTabSz="914400" rtl="0" eaLnBrk="1" latinLnBrk="0" hangingPunct="1">
+      <a:defRPr sz="1200" kern="1200">
+        <a:solidFill>
+          <a:schemeClr val="tx1"/>
+        </a:solidFill>
+        <a:latin typeface="+mn-lt"/>
+        <a:ea typeface="+mn-ea"/>
+        <a:cs typeface="+mn-cs"/>
+      </a:defRPr>
+    </a:lvl3pPr>
+    <a:lvl4pPr marL="1371600" algn="l" defTabSz="914400" rtl="0" eaLnBrk="1" latinLnBrk="0" hangingPunct="1">
+      <a:defRPr sz="1200" kern="1200">
+        <a:solidFill>
+          <a:schemeClr val="tx1"/>
+        </a:solidFill>
+        <a:latin typeface="+mn-lt"/>
+        <a:ea typeface="+mn-ea"/>
+        <a:cs typeface="+mn-cs"/>
+      </a:defRPr>
+    </a:lvl4pPr>
+    <a:lvl5pPr marL="1828800" algn="l" defTabSz="914400" rtl="0" eaLnBrk="1" latinLnBrk="0" hangingPunct="1">
+      <a:defRPr sz="1200" kern="1200">
+        <a:solidFill>
+          <a:schemeClr val="tx1"/>
+        </a:solidFill>
+        <a:latin typeface="+mn-lt"/>
+        <a:ea typeface="+mn-ea"/>
+        <a:cs typeface="+mn-cs"/>
+      </a:defRPr>
+    </a:lvl5pPr>
+    <a:lvl6pPr marL="2286000" algn="l" defTabSz="914400" rtl="0" eaLnBrk="1" latinLnBrk="0" hangingPunct="1">
+      <a:defRPr sz="1200" kern="1200">
+        <a:solidFill>
+          <a:schemeClr val="tx1"/>
+        </a:solidFill>
+        <a:latin typeface="+mn-lt"/>
+        <a:ea typeface="+mn-ea"/>
+        <a:cs typeface="+mn-cs"/>
+      </a:defRPr>
+    </a:lvl6pPr>
+    <a:lvl7pPr marL="2743200" algn="l" defTabSz="914400" rtl="0" eaLnBrk="1" latinLnBrk="0" hangingPunct="1">
+      <a:defRPr sz="1200" kern="1200">
+        <a:solidFill>
+          <a:schemeClr val="tx1"/>
+        </a:solidFill>
+        <a:latin typeface="+mn-lt"/>
+        <a:ea typeface="+mn-ea"/>
+        <a:cs typeface="+mn-cs"/>
+      </a:defRPr>
+    </a:lvl7pPr>
+    <a:lvl8pPr marL="3200400" algn="l" defTabSz="914400" rtl="0" eaLnBrk="1" latinLnBrk="0" hangingPunct="1">
+      <a:defRPr sz="1200" kern="1200">
+        <a:solidFill>
+          <a:schemeClr val="tx1"/>
+        </a:solidFill>
+        <a:latin typeface="+mn-lt"/>
+        <a:ea typeface="+mn-ea"/>
+        <a:cs typeface="+mn-cs"/>
+      </a:defRPr>
+    </a:lvl8pPr>
+    <a:lvl9pPr marL="3657600" algn="l" defTabSz="914400" rtl="0" eaLnBrk="1" latinLnBrk="0" hangingPunct="1">
+      <a:defRPr sz="1200" kern="1200">
+        <a:solidFill>
+          <a:schemeClr val="tx1"/>
+        </a:solidFill>
+        <a:latin typeface="+mn-lt"/>
+        <a:ea typeface="+mn-ea"/>
+        <a:cs typeface="+mn-cs"/>
+      </a:defRPr>
+    </a:lvl9pPr>
+  </p:notesStyle>
+</p:notesMaster>
+</file>
+
 <file path=ppt/slideLayouts/slideLayout1.xml><?xml version="1.0" encoding="utf-8"?>
 <p:sldLayout xmlns:a="http://schemas.openxmlformats.org/drawingml/2006/main" xmlns:r="http://schemas.openxmlformats.org/officeDocument/2006/relationships" xmlns:p="http://schemas.openxmlformats.org/presentationml/2006/main" preserve="1">
   <p:cSld name="Title Slide">
@@ -144,7 +496,7 @@
         </p:nvSpPr>
         <p:spPr>
           <a:xfrm>
-            <a:off x="914400" y="1058938"/>
+            <a:off x="914400" y="1058940"/>
             <a:ext cx="10363200" cy="1470025"/>
           </a:xfrm>
           <a:solidFill>
@@ -196,7 +548,7 @@
         </p:nvSpPr>
         <p:spPr>
           <a:xfrm>
-            <a:off x="2281186" y="2983610"/>
+            <a:off x="2281187" y="2983612"/>
             <a:ext cx="7609479" cy="1009561"/>
           </a:xfrm>
           <a:prstGeom prst="roundRect">
@@ -283,9 +635,9 @@
           <a:bodyPr/>
           <a:lstStyle/>
           <a:p>
-            <a:fld id="{3DFE27AF-7CD1-3844-AEE8-F7BA3575ECFE}" type="datetimeFigureOut">
+            <a:fld id="{67E0C318-02EC-014C-860F-A9AC42ED13B7}" type="datetime1">
               <a:rPr lang="en-US" smtClean="0"/>
-              <a:t>9/29/26</a:t>
+              <a:t>10/8/26</a:t>
             </a:fld>
             <a:endParaRPr lang="en-US"/>
           </a:p>
@@ -312,7 +664,10 @@
           <a:bodyPr/>
           <a:lstStyle/>
           <a:p>
-            <a:endParaRPr lang="en-US"/>
+            <a:r>
+              <a:rPr lang="en-US"/>
+              <a:t>© Steve Beaty and others as cited</a:t>
+            </a:r>
           </a:p>
         </p:txBody>
       </p:sp>
@@ -348,7 +703,7 @@
     </p:spTree>
     <p:extLst>
       <p:ext uri="{BB962C8B-B14F-4D97-AF65-F5344CB8AC3E}">
-        <p14:creationId xmlns:p14="http://schemas.microsoft.com/office/powerpoint/2010/main" val="4197922064"/>
+        <p14:creationId xmlns:p14="http://schemas.microsoft.com/office/powerpoint/2010/main" val="3861834820"/>
       </p:ext>
     </p:extLst>
   </p:cSld>
@@ -357,12 +712,12 @@
   </p:clrMapOvr>
   <mc:AlternateContent xmlns:mc="http://schemas.openxmlformats.org/markup-compatibility/2006" xmlns:p14="http://schemas.microsoft.com/office/powerpoint/2010/main">
     <mc:Choice Requires="p14">
-      <p:transition spd="slow" p14:dur="1200">
-        <p14:prism/>
+      <p:transition spd="slow" p14:dur="2000">
+        <p14:prism isContent="1"/>
       </p:transition>
     </mc:Choice>
     <mc:Fallback xmlns="">
-      <p:transition xmlns:p14="http://schemas.microsoft.com/office/powerpoint/2010/main" spd="slow">
+      <p:transition spd="slow">
         <p:fade/>
       </p:transition>
     </mc:Fallback>
@@ -486,9 +841,9 @@
           <a:bodyPr/>
           <a:lstStyle/>
           <a:p>
-            <a:fld id="{3DFE27AF-7CD1-3844-AEE8-F7BA3575ECFE}" type="datetimeFigureOut">
+            <a:fld id="{3715D051-92DA-884F-ABE4-C05D35677E56}" type="datetime1">
               <a:rPr lang="en-US" smtClean="0"/>
-              <a:t>9/29/26</a:t>
+              <a:t>10/8/26</a:t>
             </a:fld>
             <a:endParaRPr lang="en-US"/>
           </a:p>
@@ -515,13 +870,16 @@
           <a:bodyPr/>
           <a:lstStyle/>
           <a:p>
-            <a:endParaRPr lang="en-US"/>
-          </a:p>
-        </p:txBody>
-      </p:sp>
-      <p:sp>
-        <p:nvSpPr>
-          <p:cNvPr id="10" name="Slide Number Placeholder 9">
+            <a:r>
+              <a:rPr lang="en-US"/>
+              <a:t>© Steve Beaty and others as cited</a:t>
+            </a:r>
+          </a:p>
+        </p:txBody>
+      </p:sp>
+      <p:sp>
+        <p:nvSpPr>
+          <p:cNvPr id="10" name="SlideNumberWithTotal">
             <a:extLst>
               <a:ext uri="{FF2B5EF4-FFF2-40B4-BE49-F238E27FC236}">
                 <a16:creationId xmlns:a16="http://schemas.microsoft.com/office/drawing/2014/main" id="{C85ADDAF-31A4-85DD-32A3-DD43B60F68C2}"/>
@@ -551,7 +909,7 @@
     </p:spTree>
     <p:extLst>
       <p:ext uri="{BB962C8B-B14F-4D97-AF65-F5344CB8AC3E}">
-        <p14:creationId xmlns:p14="http://schemas.microsoft.com/office/powerpoint/2010/main" val="706295528"/>
+        <p14:creationId xmlns:p14="http://schemas.microsoft.com/office/powerpoint/2010/main" val="664121071"/>
       </p:ext>
     </p:extLst>
   </p:cSld>
@@ -560,12 +918,12 @@
   </p:clrMapOvr>
   <mc:AlternateContent xmlns:mc="http://schemas.openxmlformats.org/markup-compatibility/2006" xmlns:p14="http://schemas.microsoft.com/office/powerpoint/2010/main">
     <mc:Choice Requires="p14">
-      <p:transition spd="slow" p14:dur="1200">
-        <p14:prism/>
+      <p:transition spd="slow" p14:dur="2000">
+        <p14:prism isContent="1"/>
       </p:transition>
     </mc:Choice>
     <mc:Fallback xmlns="">
-      <p:transition xmlns:p14="http://schemas.microsoft.com/office/powerpoint/2010/main" spd="slow">
+      <p:transition spd="slow">
         <p:fade/>
       </p:transition>
     </mc:Fallback>
@@ -677,9 +1035,9 @@
           <a:bodyPr/>
           <a:lstStyle/>
           <a:p>
-            <a:fld id="{3DFE27AF-7CD1-3844-AEE8-F7BA3575ECFE}" type="datetimeFigureOut">
+            <a:fld id="{BDC14743-1024-9842-BA7A-4AC9FC8D6A6E}" type="datetime1">
               <a:rPr lang="en-US" smtClean="0"/>
-              <a:t>9/29/26</a:t>
+              <a:t>10/8/26</a:t>
             </a:fld>
             <a:endParaRPr lang="en-US"/>
           </a:p>
@@ -706,7 +1064,10 @@
           <a:bodyPr/>
           <a:lstStyle/>
           <a:p>
-            <a:endParaRPr lang="en-US"/>
+            <a:r>
+              <a:rPr lang="en-US"/>
+              <a:t>© Steve Beaty and others as cited</a:t>
+            </a:r>
           </a:p>
         </p:txBody>
       </p:sp>
@@ -742,13 +1103,25 @@
     </p:spTree>
     <p:extLst>
       <p:ext uri="{BB962C8B-B14F-4D97-AF65-F5344CB8AC3E}">
-        <p14:creationId xmlns:p14="http://schemas.microsoft.com/office/powerpoint/2010/main" val="523890659"/>
+        <p14:creationId xmlns:p14="http://schemas.microsoft.com/office/powerpoint/2010/main" val="2123872824"/>
       </p:ext>
     </p:extLst>
   </p:cSld>
   <p:clrMapOvr>
     <a:masterClrMapping/>
   </p:clrMapOvr>
+  <mc:AlternateContent xmlns:mc="http://schemas.openxmlformats.org/markup-compatibility/2006" xmlns:p14="http://schemas.microsoft.com/office/powerpoint/2010/main">
+    <mc:Choice Requires="p14">
+      <p:transition spd="slow" p14:dur="2000">
+        <p14:prism isContent="1"/>
+      </p:transition>
+    </mc:Choice>
+    <mc:Fallback xmlns="">
+      <p:transition spd="slow">
+        <p:fade/>
+      </p:transition>
+    </mc:Fallback>
+  </mc:AlternateContent>
 </p:sldLayout>
 </file>
 
@@ -803,7 +1176,7 @@
         </p:nvSpPr>
         <p:spPr>
           <a:xfrm>
-            <a:off x="609600" y="1602487"/>
+            <a:off x="609600" y="1602488"/>
             <a:ext cx="5321600" cy="4525963"/>
           </a:xfrm>
           <a:ln w="25400" cap="flat">
@@ -907,9 +1280,9 @@
           <a:bodyPr/>
           <a:lstStyle/>
           <a:p>
-            <a:fld id="{3DFE27AF-7CD1-3844-AEE8-F7BA3575ECFE}" type="datetimeFigureOut">
+            <a:fld id="{298C7F1A-E086-274F-838C-662E05C91877}" type="datetime1">
               <a:rPr lang="en-US" smtClean="0"/>
-              <a:t>9/29/26</a:t>
+              <a:t>10/8/26</a:t>
             </a:fld>
             <a:endParaRPr lang="en-US"/>
           </a:p>
@@ -936,7 +1309,10 @@
           <a:bodyPr/>
           <a:lstStyle/>
           <a:p>
-            <a:endParaRPr lang="en-US"/>
+            <a:r>
+              <a:rPr lang="en-US"/>
+              <a:t>© Steve Beaty and others as cited</a:t>
+            </a:r>
           </a:p>
         </p:txBody>
       </p:sp>
@@ -972,13 +1348,25 @@
     </p:spTree>
     <p:extLst>
       <p:ext uri="{BB962C8B-B14F-4D97-AF65-F5344CB8AC3E}">
-        <p14:creationId xmlns:p14="http://schemas.microsoft.com/office/powerpoint/2010/main" val="1219739430"/>
+        <p14:creationId xmlns:p14="http://schemas.microsoft.com/office/powerpoint/2010/main" val="3999494793"/>
       </p:ext>
     </p:extLst>
   </p:cSld>
   <p:clrMapOvr>
     <a:masterClrMapping/>
   </p:clrMapOvr>
+  <mc:AlternateContent xmlns:mc="http://schemas.openxmlformats.org/markup-compatibility/2006" xmlns:p14="http://schemas.microsoft.com/office/powerpoint/2010/main">
+    <mc:Choice Requires="p14">
+      <p:transition spd="slow" p14:dur="2000">
+        <p14:prism isContent="1"/>
+      </p:transition>
+    </mc:Choice>
+    <mc:Fallback xmlns="">
+      <p:transition spd="slow">
+        <p:fade/>
+      </p:transition>
+    </mc:Fallback>
+  </mc:AlternateContent>
 </p:sldLayout>
 </file>
 
@@ -1201,7 +1589,7 @@
         </p:nvSpPr>
         <p:spPr>
           <a:xfrm>
-            <a:off x="4406051" y="6308727"/>
+            <a:off x="4406052" y="6308727"/>
             <a:ext cx="1169155" cy="485424"/>
           </a:xfrm>
           <a:prstGeom prst="rect">
@@ -1212,9 +1600,9 @@
           <a:bodyPr/>
           <a:lstStyle/>
           <a:p>
-            <a:fld id="{3DFE27AF-7CD1-3844-AEE8-F7BA3575ECFE}" type="datetimeFigureOut">
+            <a:fld id="{0F1565F3-FCAD-6B4B-866B-E8A79F556F54}" type="datetime1">
               <a:rPr lang="en-US" smtClean="0"/>
-              <a:t>9/29/26</a:t>
+              <a:t>10/8/26</a:t>
             </a:fld>
             <a:endParaRPr lang="en-US"/>
           </a:p>
@@ -1235,7 +1623,10 @@
           <a:bodyPr/>
           <a:lstStyle/>
           <a:p>
-            <a:endParaRPr lang="en-US"/>
+            <a:r>
+              <a:rPr lang="en-US"/>
+              <a:t>© Steve Beaty and others as cited</a:t>
+            </a:r>
           </a:p>
         </p:txBody>
       </p:sp>
@@ -1265,7 +1656,7 @@
     </p:spTree>
     <p:extLst>
       <p:ext uri="{BB962C8B-B14F-4D97-AF65-F5344CB8AC3E}">
-        <p14:creationId xmlns:p14="http://schemas.microsoft.com/office/powerpoint/2010/main" val="3265564307"/>
+        <p14:creationId xmlns:p14="http://schemas.microsoft.com/office/powerpoint/2010/main" val="3400134503"/>
       </p:ext>
     </p:extLst>
   </p:cSld>
@@ -1274,12 +1665,12 @@
   </p:clrMapOvr>
   <mc:AlternateContent xmlns:mc="http://schemas.openxmlformats.org/markup-compatibility/2006" xmlns:p14="http://schemas.microsoft.com/office/powerpoint/2010/main">
     <mc:Choice Requires="p14">
-      <p:transition spd="slow" p14:dur="1200">
-        <p14:prism/>
+      <p:transition spd="slow" p14:dur="2000">
+        <p14:prism isContent="1"/>
       </p:transition>
     </mc:Choice>
     <mc:Fallback xmlns="">
-      <p:transition xmlns:p14="http://schemas.microsoft.com/office/powerpoint/2010/main" spd="slow">
+      <p:transition spd="slow">
         <p:fade/>
       </p:transition>
     </mc:Fallback>
@@ -1347,9 +1738,9 @@
           <a:bodyPr/>
           <a:lstStyle/>
           <a:p>
-            <a:fld id="{3DFE27AF-7CD1-3844-AEE8-F7BA3575ECFE}" type="datetimeFigureOut">
+            <a:fld id="{519067AE-3DD2-9D46-8CCD-058DBA7B0BA6}" type="datetime1">
               <a:rPr lang="en-US" smtClean="0"/>
-              <a:t>9/29/26</a:t>
+              <a:t>10/8/26</a:t>
             </a:fld>
             <a:endParaRPr lang="en-US"/>
           </a:p>
@@ -1376,7 +1767,10 @@
           <a:bodyPr/>
           <a:lstStyle/>
           <a:p>
-            <a:endParaRPr lang="en-US"/>
+            <a:r>
+              <a:rPr lang="en-US"/>
+              <a:t>© Steve Beaty and others as cited</a:t>
+            </a:r>
           </a:p>
         </p:txBody>
       </p:sp>
@@ -1412,7 +1806,7 @@
     </p:spTree>
     <p:extLst>
       <p:ext uri="{BB962C8B-B14F-4D97-AF65-F5344CB8AC3E}">
-        <p14:creationId xmlns:p14="http://schemas.microsoft.com/office/powerpoint/2010/main" val="1538604363"/>
+        <p14:creationId xmlns:p14="http://schemas.microsoft.com/office/powerpoint/2010/main" val="2672024220"/>
       </p:ext>
     </p:extLst>
   </p:cSld>
@@ -1421,12 +1815,12 @@
   </p:clrMapOvr>
   <mc:AlternateContent xmlns:mc="http://schemas.openxmlformats.org/markup-compatibility/2006" xmlns:p14="http://schemas.microsoft.com/office/powerpoint/2010/main">
     <mc:Choice Requires="p14">
-      <p:transition spd="slow" p14:dur="1200">
-        <p14:prism/>
+      <p:transition spd="slow" p14:dur="2000">
+        <p14:prism isContent="1"/>
       </p:transition>
     </mc:Choice>
     <mc:Fallback xmlns="">
-      <p:transition xmlns:p14="http://schemas.microsoft.com/office/powerpoint/2010/main" spd="slow">
+      <p:transition spd="slow">
         <p:fade/>
       </p:transition>
     </mc:Fallback>
@@ -1472,9 +1866,9 @@
           <a:bodyPr/>
           <a:lstStyle/>
           <a:p>
-            <a:fld id="{3DFE27AF-7CD1-3844-AEE8-F7BA3575ECFE}" type="datetimeFigureOut">
+            <a:fld id="{A2EA9769-B7C0-3F4A-A694-069D5F6EC463}" type="datetime1">
               <a:rPr lang="en-US" smtClean="0"/>
-              <a:t>9/29/26</a:t>
+              <a:t>10/8/26</a:t>
             </a:fld>
             <a:endParaRPr lang="en-US"/>
           </a:p>
@@ -1501,7 +1895,10 @@
           <a:bodyPr/>
           <a:lstStyle/>
           <a:p>
-            <a:endParaRPr lang="en-US"/>
+            <a:r>
+              <a:rPr lang="en-US"/>
+              <a:t>© Steve Beaty and others as cited</a:t>
+            </a:r>
           </a:p>
         </p:txBody>
       </p:sp>
@@ -1537,7 +1934,7 @@
     </p:spTree>
     <p:extLst>
       <p:ext uri="{BB962C8B-B14F-4D97-AF65-F5344CB8AC3E}">
-        <p14:creationId xmlns:p14="http://schemas.microsoft.com/office/powerpoint/2010/main" val="3313557675"/>
+        <p14:creationId xmlns:p14="http://schemas.microsoft.com/office/powerpoint/2010/main" val="4141203567"/>
       </p:ext>
     </p:extLst>
   </p:cSld>
@@ -1546,388 +1943,16 @@
   </p:clrMapOvr>
   <mc:AlternateContent xmlns:mc="http://schemas.openxmlformats.org/markup-compatibility/2006" xmlns:p14="http://schemas.microsoft.com/office/powerpoint/2010/main">
     <mc:Choice Requires="p14">
-      <p:transition spd="slow" p14:dur="1200">
-        <p14:prism/>
+      <p:transition spd="slow" p14:dur="2000">
+        <p14:prism isContent="1"/>
       </p:transition>
     </mc:Choice>
     <mc:Fallback xmlns="">
-      <p:transition xmlns:p14="http://schemas.microsoft.com/office/powerpoint/2010/main" spd="slow">
+      <p:transition spd="slow">
         <p:fade/>
       </p:transition>
     </mc:Fallback>
   </mc:AlternateContent>
-</p:sldLayout>
-</file>
-
-<file path=ppt/slideLayouts/slideLayout8.xml><?xml version="1.0" encoding="utf-8"?>
-<p:sldLayout xmlns:a="http://schemas.openxmlformats.org/drawingml/2006/main" xmlns:r="http://schemas.openxmlformats.org/officeDocument/2006/relationships" xmlns:p="http://schemas.openxmlformats.org/presentationml/2006/main">
-  <p:cSld name="Section">
-    <p:spTree>
-      <p:nvGrpSpPr>
-        <p:cNvPr id="1" name=""/>
-        <p:cNvGrpSpPr/>
-        <p:nvPr/>
-      </p:nvGrpSpPr>
-      <p:grpSpPr>
-        <a:xfrm>
-          <a:off x="0" y="0"/>
-          <a:ext cx="0" cy="0"/>
-          <a:chOff x="0" y="0"/>
-          <a:chExt cx="0" cy="0"/>
-        </a:xfrm>
-      </p:grpSpPr>
-      <p:sp>
-        <p:nvSpPr>
-          <p:cNvPr id="2" name="Title 1">
-            <a:extLst>
-              <a:ext uri="{FF2B5EF4-FFF2-40B4-BE49-F238E27FC236}">
-                <a16:creationId xmlns:a16="http://schemas.microsoft.com/office/drawing/2014/main" id="{4E0B955B-3757-0FEC-8150-652A2829B605}"/>
-              </a:ext>
-            </a:extLst>
-          </p:cNvPr>
-          <p:cNvSpPr>
-            <a:spLocks noGrp="1"/>
-          </p:cNvSpPr>
-          <p:nvPr>
-            <p:ph type="ctrTitle" hasCustomPrompt="1"/>
-          </p:nvPr>
-        </p:nvSpPr>
-        <p:spPr>
-          <a:xfrm>
-            <a:off x="1524000" y="2921168"/>
-            <a:ext cx="9144000" cy="1015663"/>
-          </a:xfrm>
-        </p:spPr>
-        <p:txBody>
-          <a:bodyPr anchor="ctr" anchorCtr="0">
-            <a:spAutoFit/>
-          </a:bodyPr>
-          <a:lstStyle>
-            <a:lvl1pPr algn="ctr">
-              <a:defRPr sz="6000"/>
-            </a:lvl1pPr>
-          </a:lstStyle>
-          <a:p>
-            <a:r>
-              <a:rPr lang="en-US" dirty="0"/>
-              <a:t>Click to edit Section</a:t>
-            </a:r>
-          </a:p>
-        </p:txBody>
-      </p:sp>
-      <p:sp>
-        <p:nvSpPr>
-          <p:cNvPr id="4" name="Date Placeholder 3">
-            <a:extLst>
-              <a:ext uri="{FF2B5EF4-FFF2-40B4-BE49-F238E27FC236}">
-                <a16:creationId xmlns:a16="http://schemas.microsoft.com/office/drawing/2014/main" id="{E6323134-95A2-6423-76C0-9D75A168C984}"/>
-              </a:ext>
-            </a:extLst>
-          </p:cNvPr>
-          <p:cNvSpPr>
-            <a:spLocks noGrp="1"/>
-          </p:cNvSpPr>
-          <p:nvPr>
-            <p:ph type="dt" sz="half" idx="10"/>
-          </p:nvPr>
-        </p:nvSpPr>
-        <p:spPr/>
-        <p:txBody>
-          <a:bodyPr/>
-          <a:lstStyle/>
-          <a:p>
-            <a:fld id="{3DFE27AF-7CD1-3844-AEE8-F7BA3575ECFE}" type="datetimeFigureOut">
-              <a:rPr lang="en-US" smtClean="0"/>
-              <a:t>9/29/26</a:t>
-            </a:fld>
-            <a:endParaRPr lang="en-US"/>
-          </a:p>
-        </p:txBody>
-      </p:sp>
-      <p:sp>
-        <p:nvSpPr>
-          <p:cNvPr id="5" name="Footer Placeholder 4">
-            <a:extLst>
-              <a:ext uri="{FF2B5EF4-FFF2-40B4-BE49-F238E27FC236}">
-                <a16:creationId xmlns:a16="http://schemas.microsoft.com/office/drawing/2014/main" id="{2419F5F4-E2F3-BFD8-53AA-6A6F195FC68B}"/>
-              </a:ext>
-            </a:extLst>
-          </p:cNvPr>
-          <p:cNvSpPr>
-            <a:spLocks noGrp="1"/>
-          </p:cNvSpPr>
-          <p:nvPr>
-            <p:ph type="ftr" sz="quarter" idx="11"/>
-          </p:nvPr>
-        </p:nvSpPr>
-        <p:spPr/>
-        <p:txBody>
-          <a:bodyPr/>
-          <a:lstStyle/>
-          <a:p>
-            <a:endParaRPr lang="en-US"/>
-          </a:p>
-        </p:txBody>
-      </p:sp>
-      <p:sp>
-        <p:nvSpPr>
-          <p:cNvPr id="6" name="Slide Number Placeholder 5">
-            <a:extLst>
-              <a:ext uri="{FF2B5EF4-FFF2-40B4-BE49-F238E27FC236}">
-                <a16:creationId xmlns:a16="http://schemas.microsoft.com/office/drawing/2014/main" id="{17B90BEB-A9D1-FF29-0E8C-A755B6F9863F}"/>
-              </a:ext>
-            </a:extLst>
-          </p:cNvPr>
-          <p:cNvSpPr>
-            <a:spLocks noGrp="1"/>
-          </p:cNvSpPr>
-          <p:nvPr>
-            <p:ph type="sldNum" sz="quarter" idx="12"/>
-          </p:nvPr>
-        </p:nvSpPr>
-        <p:spPr/>
-        <p:txBody>
-          <a:bodyPr/>
-          <a:lstStyle/>
-          <a:p>
-            <a:fld id="{6CC4E492-0BB0-1D41-A747-6FED65FF6BF7}" type="slidenum">
-              <a:rPr lang="en-US" smtClean="0"/>
-              <a:t>‹#›</a:t>
-            </a:fld>
-            <a:endParaRPr lang="en-US"/>
-          </a:p>
-        </p:txBody>
-      </p:sp>
-    </p:spTree>
-    <p:extLst>
-      <p:ext uri="{BB962C8B-B14F-4D97-AF65-F5344CB8AC3E}">
-        <p14:creationId xmlns:p14="http://schemas.microsoft.com/office/powerpoint/2010/main" val="2283945262"/>
-      </p:ext>
-    </p:extLst>
-  </p:cSld>
-  <p:clrMapOvr>
-    <a:masterClrMapping/>
-  </p:clrMapOvr>
-</p:sldLayout>
-</file>
-
-<file path=ppt/slideLayouts/slideLayout9.xml><?xml version="1.0" encoding="utf-8"?>
-<p:sldLayout xmlns:a="http://schemas.openxmlformats.org/drawingml/2006/main" xmlns:r="http://schemas.openxmlformats.org/officeDocument/2006/relationships" xmlns:p="http://schemas.openxmlformats.org/presentationml/2006/main" type="title">
-  <p:cSld name="1_Title Slide">
-    <p:spTree>
-      <p:nvGrpSpPr>
-        <p:cNvPr id="1" name=""/>
-        <p:cNvGrpSpPr/>
-        <p:nvPr/>
-      </p:nvGrpSpPr>
-      <p:grpSpPr>
-        <a:xfrm>
-          <a:off x="0" y="0"/>
-          <a:ext cx="0" cy="0"/>
-          <a:chOff x="0" y="0"/>
-          <a:chExt cx="0" cy="0"/>
-        </a:xfrm>
-      </p:grpSpPr>
-      <p:sp>
-        <p:nvSpPr>
-          <p:cNvPr id="2" name="Title 1">
-            <a:extLst>
-              <a:ext uri="{FF2B5EF4-FFF2-40B4-BE49-F238E27FC236}">
-                <a16:creationId xmlns:a16="http://schemas.microsoft.com/office/drawing/2014/main" id="{D423C985-5386-4F4F-C219-1FF9DB57E887}"/>
-              </a:ext>
-            </a:extLst>
-          </p:cNvPr>
-          <p:cNvSpPr>
-            <a:spLocks noGrp="1"/>
-          </p:cNvSpPr>
-          <p:nvPr>
-            <p:ph type="ctrTitle"/>
-          </p:nvPr>
-        </p:nvSpPr>
-        <p:spPr>
-          <a:xfrm>
-            <a:off x="1524000" y="1122363"/>
-            <a:ext cx="9144000" cy="2387600"/>
-          </a:xfrm>
-        </p:spPr>
-        <p:txBody>
-          <a:bodyPr anchor="b"/>
-          <a:lstStyle>
-            <a:lvl1pPr algn="ctr">
-              <a:defRPr sz="6000"/>
-            </a:lvl1pPr>
-          </a:lstStyle>
-          <a:p>
-            <a:r>
-              <a:rPr lang="en-US"/>
-              <a:t>Click to edit Master title style</a:t>
-            </a:r>
-          </a:p>
-        </p:txBody>
-      </p:sp>
-      <p:sp>
-        <p:nvSpPr>
-          <p:cNvPr id="3" name="Subtitle 2">
-            <a:extLst>
-              <a:ext uri="{FF2B5EF4-FFF2-40B4-BE49-F238E27FC236}">
-                <a16:creationId xmlns:a16="http://schemas.microsoft.com/office/drawing/2014/main" id="{9F40CB23-9A04-6D4B-EC01-46006780C99A}"/>
-              </a:ext>
-            </a:extLst>
-          </p:cNvPr>
-          <p:cNvSpPr>
-            <a:spLocks noGrp="1"/>
-          </p:cNvSpPr>
-          <p:nvPr>
-            <p:ph type="subTitle" idx="1"/>
-          </p:nvPr>
-        </p:nvSpPr>
-        <p:spPr>
-          <a:xfrm>
-            <a:off x="1524000" y="3602038"/>
-            <a:ext cx="9144000" cy="1655762"/>
-          </a:xfrm>
-        </p:spPr>
-        <p:txBody>
-          <a:bodyPr/>
-          <a:lstStyle>
-            <a:lvl1pPr marL="0" indent="0" algn="ctr">
-              <a:buNone/>
-              <a:defRPr sz="2400"/>
-            </a:lvl1pPr>
-            <a:lvl2pPr marL="457200" indent="0" algn="ctr">
-              <a:buNone/>
-              <a:defRPr sz="2000"/>
-            </a:lvl2pPr>
-            <a:lvl3pPr marL="914400" indent="0" algn="ctr">
-              <a:buNone/>
-              <a:defRPr sz="1800"/>
-            </a:lvl3pPr>
-            <a:lvl4pPr marL="1371600" indent="0" algn="ctr">
-              <a:buNone/>
-              <a:defRPr sz="1600"/>
-            </a:lvl4pPr>
-            <a:lvl5pPr marL="1828800" indent="0" algn="ctr">
-              <a:buNone/>
-              <a:defRPr sz="1600"/>
-            </a:lvl5pPr>
-            <a:lvl6pPr marL="2286000" indent="0" algn="ctr">
-              <a:buNone/>
-              <a:defRPr sz="1600"/>
-            </a:lvl6pPr>
-            <a:lvl7pPr marL="2743200" indent="0" algn="ctr">
-              <a:buNone/>
-              <a:defRPr sz="1600"/>
-            </a:lvl7pPr>
-            <a:lvl8pPr marL="3200400" indent="0" algn="ctr">
-              <a:buNone/>
-              <a:defRPr sz="1600"/>
-            </a:lvl8pPr>
-            <a:lvl9pPr marL="3657600" indent="0" algn="ctr">
-              <a:buNone/>
-              <a:defRPr sz="1600"/>
-            </a:lvl9pPr>
-          </a:lstStyle>
-          <a:p>
-            <a:r>
-              <a:rPr lang="en-US"/>
-              <a:t>Click to edit Master subtitle style</a:t>
-            </a:r>
-          </a:p>
-        </p:txBody>
-      </p:sp>
-      <p:sp>
-        <p:nvSpPr>
-          <p:cNvPr id="4" name="Date Placeholder 3">
-            <a:extLst>
-              <a:ext uri="{FF2B5EF4-FFF2-40B4-BE49-F238E27FC236}">
-                <a16:creationId xmlns:a16="http://schemas.microsoft.com/office/drawing/2014/main" id="{2B275FD3-9331-2933-7C92-C43D6A3C948B}"/>
-              </a:ext>
-            </a:extLst>
-          </p:cNvPr>
-          <p:cNvSpPr>
-            <a:spLocks noGrp="1"/>
-          </p:cNvSpPr>
-          <p:nvPr>
-            <p:ph type="dt" sz="half" idx="10"/>
-          </p:nvPr>
-        </p:nvSpPr>
-        <p:spPr/>
-        <p:txBody>
-          <a:bodyPr/>
-          <a:lstStyle/>
-          <a:p>
-            <a:fld id="{3DFE27AF-7CD1-3844-AEE8-F7BA3575ECFE}" type="datetimeFigureOut">
-              <a:rPr lang="en-US" smtClean="0"/>
-              <a:t>9/29/26</a:t>
-            </a:fld>
-            <a:endParaRPr lang="en-US"/>
-          </a:p>
-        </p:txBody>
-      </p:sp>
-      <p:sp>
-        <p:nvSpPr>
-          <p:cNvPr id="5" name="Footer Placeholder 4">
-            <a:extLst>
-              <a:ext uri="{FF2B5EF4-FFF2-40B4-BE49-F238E27FC236}">
-                <a16:creationId xmlns:a16="http://schemas.microsoft.com/office/drawing/2014/main" id="{A6DCBD97-0334-1ABB-C73E-267FADEBC662}"/>
-              </a:ext>
-            </a:extLst>
-          </p:cNvPr>
-          <p:cNvSpPr>
-            <a:spLocks noGrp="1"/>
-          </p:cNvSpPr>
-          <p:nvPr>
-            <p:ph type="ftr" sz="quarter" idx="11"/>
-          </p:nvPr>
-        </p:nvSpPr>
-        <p:spPr/>
-        <p:txBody>
-          <a:bodyPr/>
-          <a:lstStyle/>
-          <a:p>
-            <a:endParaRPr lang="en-US"/>
-          </a:p>
-        </p:txBody>
-      </p:sp>
-      <p:sp>
-        <p:nvSpPr>
-          <p:cNvPr id="6" name="Slide Number Placeholder 5">
-            <a:extLst>
-              <a:ext uri="{FF2B5EF4-FFF2-40B4-BE49-F238E27FC236}">
-                <a16:creationId xmlns:a16="http://schemas.microsoft.com/office/drawing/2014/main" id="{8CDE3E44-7A65-D95B-7F63-2C5949CD3E4C}"/>
-              </a:ext>
-            </a:extLst>
-          </p:cNvPr>
-          <p:cNvSpPr>
-            <a:spLocks noGrp="1"/>
-          </p:cNvSpPr>
-          <p:nvPr>
-            <p:ph type="sldNum" sz="quarter" idx="12"/>
-          </p:nvPr>
-        </p:nvSpPr>
-        <p:spPr/>
-        <p:txBody>
-          <a:bodyPr/>
-          <a:lstStyle/>
-          <a:p>
-            <a:fld id="{6CC4E492-0BB0-1D41-A747-6FED65FF6BF7}" type="slidenum">
-              <a:rPr lang="en-US" smtClean="0"/>
-              <a:t>‹#›</a:t>
-            </a:fld>
-            <a:endParaRPr lang="en-US"/>
-          </a:p>
-        </p:txBody>
-      </p:sp>
-    </p:spTree>
-    <p:extLst>
-      <p:ext uri="{BB962C8B-B14F-4D97-AF65-F5344CB8AC3E}">
-        <p14:creationId xmlns:p14="http://schemas.microsoft.com/office/powerpoint/2010/main" val="3585295671"/>
-      </p:ext>
-    </p:extLst>
-  </p:cSld>
-  <p:clrMapOvr>
-    <a:masterClrMapping/>
-  </p:clrMapOvr>
 </p:sldLayout>
 </file>
 
@@ -1937,7 +1962,7 @@
     <p:bg>
       <p:bgPr>
         <a:blipFill dpi="0" rotWithShape="1">
-          <a:blip r:embed="rId11">
+          <a:blip r:embed="rId9">
             <a:lum/>
           </a:blip>
           <a:srcRect/>
@@ -2101,8 +2126,8 @@
         </p:nvSpPr>
         <p:spPr>
           <a:xfrm>
-            <a:off x="1881808" y="6308726"/>
-            <a:ext cx="8605793" cy="487680"/>
+            <a:off x="1881809" y="6308727"/>
+            <a:ext cx="7945363" cy="487680"/>
           </a:xfrm>
           <a:prstGeom prst="roundRect">
             <a:avLst>
@@ -2128,7 +2153,10 @@
             </a:lvl1pPr>
           </a:lstStyle>
           <a:p>
-            <a:endParaRPr lang="en-US"/>
+            <a:r>
+              <a:rPr lang="en-US"/>
+              <a:t>© Steve Beaty and others as cited</a:t>
+            </a:r>
           </a:p>
         </p:txBody>
       </p:sp>
@@ -2144,7 +2172,7 @@
         </p:nvSpPr>
         <p:spPr>
           <a:xfrm>
-            <a:off x="10595113" y="6308726"/>
+            <a:off x="9934686" y="6308727"/>
             <a:ext cx="879777" cy="487680"/>
           </a:xfrm>
           <a:prstGeom prst="roundRect">
@@ -2199,7 +2227,7 @@
         </p:nvSpPr>
         <p:spPr>
           <a:xfrm>
-            <a:off x="605141" y="6308726"/>
+            <a:off x="605141" y="6308727"/>
             <a:ext cx="1169155" cy="487680"/>
           </a:xfrm>
           <a:prstGeom prst="roundRect">
@@ -2222,32 +2250,169 @@
             </a:lvl1pPr>
           </a:lstStyle>
           <a:p>
-            <a:fld id="{3DFE27AF-7CD1-3844-AEE8-F7BA3575ECFE}" type="datetimeFigureOut">
+            <a:fld id="{2F7D9BE9-AD84-8B4B-AF2B-708E7F6FD978}" type="datetime1">
               <a:rPr lang="en-US" smtClean="0"/>
-              <a:t>9/29/26</a:t>
+              <a:t>10/8/26</a:t>
             </a:fld>
             <a:endParaRPr lang="en-US"/>
+          </a:p>
+        </p:txBody>
+      </p:sp>
+      <p:sp>
+        <p:nvSpPr>
+          <p:cNvPr id="7" name="SlideTotal">
+            <a:extLst>
+              <a:ext uri="{FF2B5EF4-FFF2-40B4-BE49-F238E27FC236}">
+                <a16:creationId xmlns:a16="http://schemas.microsoft.com/office/drawing/2014/main" id="{B74D5B4B-3C60-FF6A-4438-A067B7DE7333}"/>
+              </a:ext>
+            </a:extLst>
+          </p:cNvPr>
+          <p:cNvSpPr txBox="1">
+            <a:spLocks/>
+          </p:cNvSpPr>
+          <p:nvPr/>
+        </p:nvSpPr>
+        <p:spPr>
+          <a:xfrm>
+            <a:off x="10702624" y="6308727"/>
+            <a:ext cx="879777" cy="487680"/>
+          </a:xfrm>
+          <a:prstGeom prst="roundRect">
+            <a:avLst>
+              <a:gd name="adj" fmla="val 43034"/>
+            </a:avLst>
+          </a:prstGeom>
+          <a:solidFill>
+            <a:schemeClr val="bg1"/>
+          </a:solidFill>
+          <a:effectLst>
+            <a:softEdge rad="63500"/>
+          </a:effectLst>
+        </p:spPr>
+        <p:txBody>
+          <a:bodyPr vert="horz" lIns="121920" tIns="60960" rIns="121920" bIns="60960" rtlCol="0" anchor="ctr"/>
+          <a:lstStyle>
+            <a:defPPr>
+              <a:defRPr lang="en-US"/>
+            </a:defPPr>
+            <a:lvl1pPr marL="0" algn="ctr" defTabSz="914400" rtl="0" eaLnBrk="1" latinLnBrk="0" hangingPunct="1">
+              <a:defRPr sz="1200" kern="1200">
+                <a:solidFill>
+                  <a:schemeClr val="tx1">
+                    <a:tint val="75000"/>
+                  </a:schemeClr>
+                </a:solidFill>
+                <a:latin typeface="+mn-lt"/>
+                <a:ea typeface="+mn-ea"/>
+                <a:cs typeface="+mn-cs"/>
+              </a:defRPr>
+            </a:lvl1pPr>
+            <a:lvl2pPr marL="457200" algn="l" defTabSz="914400" rtl="0" eaLnBrk="1" latinLnBrk="0" hangingPunct="1">
+              <a:defRPr sz="1800" kern="1200">
+                <a:solidFill>
+                  <a:schemeClr val="tx1"/>
+                </a:solidFill>
+                <a:latin typeface="+mn-lt"/>
+                <a:ea typeface="+mn-ea"/>
+                <a:cs typeface="+mn-cs"/>
+              </a:defRPr>
+            </a:lvl2pPr>
+            <a:lvl3pPr marL="914400" algn="l" defTabSz="914400" rtl="0" eaLnBrk="1" latinLnBrk="0" hangingPunct="1">
+              <a:defRPr sz="1800" kern="1200">
+                <a:solidFill>
+                  <a:schemeClr val="tx1"/>
+                </a:solidFill>
+                <a:latin typeface="+mn-lt"/>
+                <a:ea typeface="+mn-ea"/>
+                <a:cs typeface="+mn-cs"/>
+              </a:defRPr>
+            </a:lvl3pPr>
+            <a:lvl4pPr marL="1371600" algn="l" defTabSz="914400" rtl="0" eaLnBrk="1" latinLnBrk="0" hangingPunct="1">
+              <a:defRPr sz="1800" kern="1200">
+                <a:solidFill>
+                  <a:schemeClr val="tx1"/>
+                </a:solidFill>
+                <a:latin typeface="+mn-lt"/>
+                <a:ea typeface="+mn-ea"/>
+                <a:cs typeface="+mn-cs"/>
+              </a:defRPr>
+            </a:lvl4pPr>
+            <a:lvl5pPr marL="1828800" algn="l" defTabSz="914400" rtl="0" eaLnBrk="1" latinLnBrk="0" hangingPunct="1">
+              <a:defRPr sz="1800" kern="1200">
+                <a:solidFill>
+                  <a:schemeClr val="tx1"/>
+                </a:solidFill>
+                <a:latin typeface="+mn-lt"/>
+                <a:ea typeface="+mn-ea"/>
+                <a:cs typeface="+mn-cs"/>
+              </a:defRPr>
+            </a:lvl5pPr>
+            <a:lvl6pPr marL="2286000" algn="l" defTabSz="914400" rtl="0" eaLnBrk="1" latinLnBrk="0" hangingPunct="1">
+              <a:defRPr sz="1800" kern="1200">
+                <a:solidFill>
+                  <a:schemeClr val="tx1"/>
+                </a:solidFill>
+                <a:latin typeface="+mn-lt"/>
+                <a:ea typeface="+mn-ea"/>
+                <a:cs typeface="+mn-cs"/>
+              </a:defRPr>
+            </a:lvl6pPr>
+            <a:lvl7pPr marL="2743200" algn="l" defTabSz="914400" rtl="0" eaLnBrk="1" latinLnBrk="0" hangingPunct="1">
+              <a:defRPr sz="1800" kern="1200">
+                <a:solidFill>
+                  <a:schemeClr val="tx1"/>
+                </a:solidFill>
+                <a:latin typeface="+mn-lt"/>
+                <a:ea typeface="+mn-ea"/>
+                <a:cs typeface="+mn-cs"/>
+              </a:defRPr>
+            </a:lvl7pPr>
+            <a:lvl8pPr marL="3200400" algn="l" defTabSz="914400" rtl="0" eaLnBrk="1" latinLnBrk="0" hangingPunct="1">
+              <a:defRPr sz="1800" kern="1200">
+                <a:solidFill>
+                  <a:schemeClr val="tx1"/>
+                </a:solidFill>
+                <a:latin typeface="+mn-lt"/>
+                <a:ea typeface="+mn-ea"/>
+                <a:cs typeface="+mn-cs"/>
+              </a:defRPr>
+            </a:lvl8pPr>
+            <a:lvl9pPr marL="3657600" algn="l" defTabSz="914400" rtl="0" eaLnBrk="1" latinLnBrk="0" hangingPunct="1">
+              <a:defRPr sz="1800" kern="1200">
+                <a:solidFill>
+                  <a:schemeClr val="tx1"/>
+                </a:solidFill>
+                <a:latin typeface="+mn-lt"/>
+                <a:ea typeface="+mn-ea"/>
+                <a:cs typeface="+mn-cs"/>
+              </a:defRPr>
+            </a:lvl9pPr>
+          </a:lstStyle>
+          <a:p>
+            <a:r>
+              <a:rPr lang="en-US" sz="1600"/>
+              <a:t>4</a:t>
+            </a:r>
+            <a:endParaRPr lang="en-US" sz="1600" dirty="0"/>
           </a:p>
         </p:txBody>
       </p:sp>
     </p:spTree>
     <p:extLst>
       <p:ext uri="{BB962C8B-B14F-4D97-AF65-F5344CB8AC3E}">
-        <p14:creationId xmlns:p14="http://schemas.microsoft.com/office/powerpoint/2010/main" val="936311927"/>
+        <p14:creationId xmlns:p14="http://schemas.microsoft.com/office/powerpoint/2010/main" val="1749457399"/>
       </p:ext>
     </p:extLst>
   </p:cSld>
   <p:clrMap bg1="lt1" tx1="dk1" bg2="lt2" tx2="dk2" accent1="accent1" accent2="accent2" accent3="accent3" accent4="accent4" accent5="accent5" accent6="accent6" hlink="hlink" folHlink="folHlink"/>
   <p:sldLayoutIdLst>
-    <p:sldLayoutId id="2147483661" r:id="rId1"/>
-    <p:sldLayoutId id="2147483662" r:id="rId2"/>
-    <p:sldLayoutId id="2147483663" r:id="rId3"/>
-    <p:sldLayoutId id="2147483664" r:id="rId4"/>
-    <p:sldLayoutId id="2147483665" r:id="rId5"/>
-    <p:sldLayoutId id="2147483666" r:id="rId6"/>
-    <p:sldLayoutId id="2147483667" r:id="rId7"/>
-    <p:sldLayoutId id="2147483668" r:id="rId8"/>
-    <p:sldLayoutId id="2147483669" r:id="rId9"/>
+    <p:sldLayoutId id="2147483671" r:id="rId1"/>
+    <p:sldLayoutId id="2147483672" r:id="rId2"/>
+    <p:sldLayoutId id="2147483673" r:id="rId3"/>
+    <p:sldLayoutId id="2147483674" r:id="rId4"/>
+    <p:sldLayoutId id="2147483675" r:id="rId5"/>
+    <p:sldLayoutId id="2147483676" r:id="rId6"/>
+    <p:sldLayoutId id="2147483677" r:id="rId7"/>
   </p:sldLayoutIdLst>
   <mc:AlternateContent xmlns:mc="http://schemas.openxmlformats.org/markup-compatibility/2006" xmlns:p14="http://schemas.microsoft.com/office/powerpoint/2010/main">
     <mc:Choice Requires="p14">
@@ -2261,9 +2426,10 @@
       </p:transition>
     </mc:Fallback>
   </mc:AlternateContent>
+  <p:hf hdr="0"/>
   <p:txStyles>
     <p:titleStyle>
-      <a:lvl1pPr algn="ctr" defTabSz="609570" rtl="0" eaLnBrk="1" latinLnBrk="0" hangingPunct="1">
+      <a:lvl1pPr algn="ctr" defTabSz="609555" rtl="0" eaLnBrk="1" latinLnBrk="0" hangingPunct="1">
         <a:spcBef>
           <a:spcPct val="0"/>
         </a:spcBef>
@@ -2279,7 +2445,7 @@
       </a:lvl1pPr>
     </p:titleStyle>
     <p:bodyStyle>
-      <a:lvl1pPr marL="457177" indent="-457177" algn="l" defTabSz="609570" rtl="0" eaLnBrk="1" latinLnBrk="0" hangingPunct="1">
+      <a:lvl1pPr marL="457166" indent="-457166" algn="l" defTabSz="609555" rtl="0" eaLnBrk="1" latinLnBrk="0" hangingPunct="1">
         <a:spcBef>
           <a:spcPct val="20000"/>
         </a:spcBef>
@@ -2294,7 +2460,7 @@
           <a:cs typeface="+mn-cs"/>
         </a:defRPr>
       </a:lvl1pPr>
-      <a:lvl2pPr marL="990551" indent="-380982" algn="l" defTabSz="609570" rtl="0" eaLnBrk="1" latinLnBrk="0" hangingPunct="1">
+      <a:lvl2pPr marL="990526" indent="-380973" algn="l" defTabSz="609555" rtl="0" eaLnBrk="1" latinLnBrk="0" hangingPunct="1">
         <a:spcBef>
           <a:spcPct val="20000"/>
         </a:spcBef>
@@ -2309,7 +2475,7 @@
           <a:cs typeface="+mn-cs"/>
         </a:defRPr>
       </a:lvl2pPr>
-      <a:lvl3pPr marL="1523923" indent="-304784" algn="l" defTabSz="609570" rtl="0" eaLnBrk="1" latinLnBrk="0" hangingPunct="1">
+      <a:lvl3pPr marL="1523885" indent="-304776" algn="l" defTabSz="609555" rtl="0" eaLnBrk="1" latinLnBrk="0" hangingPunct="1">
         <a:spcBef>
           <a:spcPct val="20000"/>
         </a:spcBef>
@@ -2324,7 +2490,7 @@
           <a:cs typeface="+mn-cs"/>
         </a:defRPr>
       </a:lvl3pPr>
-      <a:lvl4pPr marL="2133493" indent="-304784" algn="l" defTabSz="609570" rtl="0" eaLnBrk="1" latinLnBrk="0" hangingPunct="1">
+      <a:lvl4pPr marL="2133440" indent="-304776" algn="l" defTabSz="609555" rtl="0" eaLnBrk="1" latinLnBrk="0" hangingPunct="1">
         <a:spcBef>
           <a:spcPct val="20000"/>
         </a:spcBef>
@@ -2339,7 +2505,7 @@
           <a:cs typeface="+mn-cs"/>
         </a:defRPr>
       </a:lvl4pPr>
-      <a:lvl5pPr marL="2743063" indent="-304784" algn="l" defTabSz="609570" rtl="0" eaLnBrk="1" latinLnBrk="0" hangingPunct="1">
+      <a:lvl5pPr marL="2742994" indent="-304776" algn="l" defTabSz="609555" rtl="0" eaLnBrk="1" latinLnBrk="0" hangingPunct="1">
         <a:spcBef>
           <a:spcPct val="20000"/>
         </a:spcBef>
@@ -2354,7 +2520,7 @@
           <a:cs typeface="+mn-cs"/>
         </a:defRPr>
       </a:lvl5pPr>
-      <a:lvl6pPr marL="3352632" indent="-304784" algn="l" defTabSz="609570" rtl="0" eaLnBrk="1" latinLnBrk="0" hangingPunct="1">
+      <a:lvl6pPr marL="3352548" indent="-304776" algn="l" defTabSz="609555" rtl="0" eaLnBrk="1" latinLnBrk="0" hangingPunct="1">
         <a:spcBef>
           <a:spcPct val="20000"/>
         </a:spcBef>
@@ -2369,7 +2535,7 @@
           <a:cs typeface="+mn-cs"/>
         </a:defRPr>
       </a:lvl6pPr>
-      <a:lvl7pPr marL="3962202" indent="-304784" algn="l" defTabSz="609570" rtl="0" eaLnBrk="1" latinLnBrk="0" hangingPunct="1">
+      <a:lvl7pPr marL="3962104" indent="-304776" algn="l" defTabSz="609555" rtl="0" eaLnBrk="1" latinLnBrk="0" hangingPunct="1">
         <a:spcBef>
           <a:spcPct val="20000"/>
         </a:spcBef>
@@ -2384,7 +2550,7 @@
           <a:cs typeface="+mn-cs"/>
         </a:defRPr>
       </a:lvl7pPr>
-      <a:lvl8pPr marL="4571771" indent="-304784" algn="l" defTabSz="609570" rtl="0" eaLnBrk="1" latinLnBrk="0" hangingPunct="1">
+      <a:lvl8pPr marL="4571656" indent="-304776" algn="l" defTabSz="609555" rtl="0" eaLnBrk="1" latinLnBrk="0" hangingPunct="1">
         <a:spcBef>
           <a:spcPct val="20000"/>
         </a:spcBef>
@@ -2399,7 +2565,7 @@
           <a:cs typeface="+mn-cs"/>
         </a:defRPr>
       </a:lvl8pPr>
-      <a:lvl9pPr marL="5181341" indent="-304784" algn="l" defTabSz="609570" rtl="0" eaLnBrk="1" latinLnBrk="0" hangingPunct="1">
+      <a:lvl9pPr marL="5181212" indent="-304776" algn="l" defTabSz="609555" rtl="0" eaLnBrk="1" latinLnBrk="0" hangingPunct="1">
         <a:spcBef>
           <a:spcPct val="20000"/>
         </a:spcBef>
@@ -2419,7 +2585,7 @@
       <a:defPPr>
         <a:defRPr lang="en-US"/>
       </a:defPPr>
-      <a:lvl1pPr marL="0" algn="l" defTabSz="609570" rtl="0" eaLnBrk="1" latinLnBrk="0" hangingPunct="1">
+      <a:lvl1pPr marL="0" algn="l" defTabSz="609555" rtl="0" eaLnBrk="1" latinLnBrk="0" hangingPunct="1">
         <a:defRPr sz="2400" kern="1200">
           <a:solidFill>
             <a:schemeClr val="tx1"/>
@@ -2429,7 +2595,7 @@
           <a:cs typeface="+mn-cs"/>
         </a:defRPr>
       </a:lvl1pPr>
-      <a:lvl2pPr marL="609570" algn="l" defTabSz="609570" rtl="0" eaLnBrk="1" latinLnBrk="0" hangingPunct="1">
+      <a:lvl2pPr marL="609555" algn="l" defTabSz="609555" rtl="0" eaLnBrk="1" latinLnBrk="0" hangingPunct="1">
         <a:defRPr sz="2400" kern="1200">
           <a:solidFill>
             <a:schemeClr val="tx1"/>
@@ -2439,7 +2605,7 @@
           <a:cs typeface="+mn-cs"/>
         </a:defRPr>
       </a:lvl2pPr>
-      <a:lvl3pPr marL="1219139" algn="l" defTabSz="609570" rtl="0" eaLnBrk="1" latinLnBrk="0" hangingPunct="1">
+      <a:lvl3pPr marL="1219108" algn="l" defTabSz="609555" rtl="0" eaLnBrk="1" latinLnBrk="0" hangingPunct="1">
         <a:defRPr sz="2400" kern="1200">
           <a:solidFill>
             <a:schemeClr val="tx1"/>
@@ -2449,7 +2615,7 @@
           <a:cs typeface="+mn-cs"/>
         </a:defRPr>
       </a:lvl3pPr>
-      <a:lvl4pPr marL="1828709" algn="l" defTabSz="609570" rtl="0" eaLnBrk="1" latinLnBrk="0" hangingPunct="1">
+      <a:lvl4pPr marL="1828664" algn="l" defTabSz="609555" rtl="0" eaLnBrk="1" latinLnBrk="0" hangingPunct="1">
         <a:defRPr sz="2400" kern="1200">
           <a:solidFill>
             <a:schemeClr val="tx1"/>
@@ -2459,7 +2625,7 @@
           <a:cs typeface="+mn-cs"/>
         </a:defRPr>
       </a:lvl4pPr>
-      <a:lvl5pPr marL="2438278" algn="l" defTabSz="609570" rtl="0" eaLnBrk="1" latinLnBrk="0" hangingPunct="1">
+      <a:lvl5pPr marL="2438218" algn="l" defTabSz="609555" rtl="0" eaLnBrk="1" latinLnBrk="0" hangingPunct="1">
         <a:defRPr sz="2400" kern="1200">
           <a:solidFill>
             <a:schemeClr val="tx1"/>
@@ -2469,7 +2635,7 @@
           <a:cs typeface="+mn-cs"/>
         </a:defRPr>
       </a:lvl5pPr>
-      <a:lvl6pPr marL="3047848" algn="l" defTabSz="609570" rtl="0" eaLnBrk="1" latinLnBrk="0" hangingPunct="1">
+      <a:lvl6pPr marL="3047772" algn="l" defTabSz="609555" rtl="0" eaLnBrk="1" latinLnBrk="0" hangingPunct="1">
         <a:defRPr sz="2400" kern="1200">
           <a:solidFill>
             <a:schemeClr val="tx1"/>
@@ -2479,7 +2645,7 @@
           <a:cs typeface="+mn-cs"/>
         </a:defRPr>
       </a:lvl6pPr>
-      <a:lvl7pPr marL="3657417" algn="l" defTabSz="609570" rtl="0" eaLnBrk="1" latinLnBrk="0" hangingPunct="1">
+      <a:lvl7pPr marL="3657326" algn="l" defTabSz="609555" rtl="0" eaLnBrk="1" latinLnBrk="0" hangingPunct="1">
         <a:defRPr sz="2400" kern="1200">
           <a:solidFill>
             <a:schemeClr val="tx1"/>
@@ -2489,7 +2655,7 @@
           <a:cs typeface="+mn-cs"/>
         </a:defRPr>
       </a:lvl7pPr>
-      <a:lvl8pPr marL="4266987" algn="l" defTabSz="609570" rtl="0" eaLnBrk="1" latinLnBrk="0" hangingPunct="1">
+      <a:lvl8pPr marL="4266880" algn="l" defTabSz="609555" rtl="0" eaLnBrk="1" latinLnBrk="0" hangingPunct="1">
         <a:defRPr sz="2400" kern="1200">
           <a:solidFill>
             <a:schemeClr val="tx1"/>
@@ -2499,7 +2665,7 @@
           <a:cs typeface="+mn-cs"/>
         </a:defRPr>
       </a:lvl8pPr>
-      <a:lvl9pPr marL="4876557" algn="l" defTabSz="609570" rtl="0" eaLnBrk="1" latinLnBrk="0" hangingPunct="1">
+      <a:lvl9pPr marL="4876435" algn="l" defTabSz="609555" rtl="0" eaLnBrk="1" latinLnBrk="0" hangingPunct="1">
         <a:defRPr sz="2400" kern="1200">
           <a:solidFill>
             <a:schemeClr val="tx1"/>
@@ -2584,6 +2750,92 @@
           </a:p>
         </p:txBody>
       </p:sp>
+      <p:sp>
+        <p:nvSpPr>
+          <p:cNvPr id="3" name="Date Placeholder 2">
+            <a:extLst>
+              <a:ext uri="{FF2B5EF4-FFF2-40B4-BE49-F238E27FC236}">
+                <a16:creationId xmlns:a16="http://schemas.microsoft.com/office/drawing/2014/main" id="{7437D417-22DD-7605-E7F9-1D751CCA7FA0}"/>
+              </a:ext>
+            </a:extLst>
+          </p:cNvPr>
+          <p:cNvSpPr>
+            <a:spLocks noGrp="1"/>
+          </p:cNvSpPr>
+          <p:nvPr>
+            <p:ph type="dt" sz="half" idx="11"/>
+          </p:nvPr>
+        </p:nvSpPr>
+        <p:spPr/>
+        <p:txBody>
+          <a:bodyPr/>
+          <a:lstStyle/>
+          <a:p>
+            <a:fld id="{85B23BBE-B83A-9F4F-8DCB-E5FDDBBC048A}" type="datetime1">
+              <a:rPr lang="en-US" smtClean="0"/>
+              <a:t>10/8/26</a:t>
+            </a:fld>
+            <a:endParaRPr lang="en-US"/>
+          </a:p>
+        </p:txBody>
+      </p:sp>
+      <p:sp>
+        <p:nvSpPr>
+          <p:cNvPr id="5" name="Footer Placeholder 4">
+            <a:extLst>
+              <a:ext uri="{FF2B5EF4-FFF2-40B4-BE49-F238E27FC236}">
+                <a16:creationId xmlns:a16="http://schemas.microsoft.com/office/drawing/2014/main" id="{6B4F9192-E591-4C79-C02E-D3243A488603}"/>
+              </a:ext>
+            </a:extLst>
+          </p:cNvPr>
+          <p:cNvSpPr>
+            <a:spLocks noGrp="1"/>
+          </p:cNvSpPr>
+          <p:nvPr>
+            <p:ph type="ftr" sz="quarter" idx="12"/>
+          </p:nvPr>
+        </p:nvSpPr>
+        <p:spPr/>
+        <p:txBody>
+          <a:bodyPr/>
+          <a:lstStyle/>
+          <a:p>
+            <a:r>
+              <a:rPr lang="en-US"/>
+              <a:t>© Steve Beaty and others as cited</a:t>
+            </a:r>
+          </a:p>
+        </p:txBody>
+      </p:sp>
+      <p:sp>
+        <p:nvSpPr>
+          <p:cNvPr id="6" name="Slide Number Placeholder 5">
+            <a:extLst>
+              <a:ext uri="{FF2B5EF4-FFF2-40B4-BE49-F238E27FC236}">
+                <a16:creationId xmlns:a16="http://schemas.microsoft.com/office/drawing/2014/main" id="{06B2C517-2B7F-1ECD-9E5F-CBF20B0050E7}"/>
+              </a:ext>
+            </a:extLst>
+          </p:cNvPr>
+          <p:cNvSpPr>
+            <a:spLocks noGrp="1"/>
+          </p:cNvSpPr>
+          <p:nvPr>
+            <p:ph type="sldNum" sz="quarter" idx="13"/>
+          </p:nvPr>
+        </p:nvSpPr>
+        <p:spPr/>
+        <p:txBody>
+          <a:bodyPr/>
+          <a:lstStyle/>
+          <a:p>
+            <a:fld id="{6CC4E492-0BB0-1D41-A747-6FED65FF6BF7}" type="slidenum">
+              <a:rPr lang="en-US" smtClean="0"/>
+              <a:t>1</a:t>
+            </a:fld>
+            <a:endParaRPr lang="en-US"/>
+          </a:p>
+        </p:txBody>
+      </p:sp>
     </p:spTree>
     <p:extLst>
       <p:ext uri="{BB962C8B-B14F-4D97-AF65-F5344CB8AC3E}">
@@ -2596,12 +2848,12 @@
   </p:clrMapOvr>
   <mc:AlternateContent xmlns:mc="http://schemas.openxmlformats.org/markup-compatibility/2006" xmlns:p14="http://schemas.microsoft.com/office/powerpoint/2010/main">
     <mc:Choice Requires="p14">
-      <p:transition spd="slow" p14:dur="1200">
-        <p14:prism/>
+      <p:transition spd="slow" p14:dur="2000">
+        <p14:prism isContent="1"/>
       </p:transition>
     </mc:Choice>
     <mc:Fallback xmlns="">
-      <p:transition xmlns:p14="http://schemas.microsoft.com/office/powerpoint/2010/main" spd="slow">
+      <p:transition spd="slow">
         <p:fade/>
       </p:transition>
     </mc:Fallback>
@@ -2697,6 +2949,92 @@
               <a:t> </a:t>
             </a:r>
             <a:endParaRPr lang="en-US" dirty="0"/>
+          </a:p>
+        </p:txBody>
+      </p:sp>
+      <p:sp>
+        <p:nvSpPr>
+          <p:cNvPr id="2" name="Date Placeholder 1">
+            <a:extLst>
+              <a:ext uri="{FF2B5EF4-FFF2-40B4-BE49-F238E27FC236}">
+                <a16:creationId xmlns:a16="http://schemas.microsoft.com/office/drawing/2014/main" id="{CE30FA34-969E-7A24-2A84-E1B8D2D3C585}"/>
+              </a:ext>
+            </a:extLst>
+          </p:cNvPr>
+          <p:cNvSpPr>
+            <a:spLocks noGrp="1"/>
+          </p:cNvSpPr>
+          <p:nvPr>
+            <p:ph type="dt" sz="half" idx="10"/>
+          </p:nvPr>
+        </p:nvSpPr>
+        <p:spPr/>
+        <p:txBody>
+          <a:bodyPr/>
+          <a:lstStyle/>
+          <a:p>
+            <a:fld id="{AD8D7AA3-6C39-2A46-B1BA-7584BE2BE0C8}" type="datetime1">
+              <a:rPr lang="en-US" smtClean="0"/>
+              <a:t>10/8/26</a:t>
+            </a:fld>
+            <a:endParaRPr lang="en-US"/>
+          </a:p>
+        </p:txBody>
+      </p:sp>
+      <p:sp>
+        <p:nvSpPr>
+          <p:cNvPr id="5" name="Footer Placeholder 4">
+            <a:extLst>
+              <a:ext uri="{FF2B5EF4-FFF2-40B4-BE49-F238E27FC236}">
+                <a16:creationId xmlns:a16="http://schemas.microsoft.com/office/drawing/2014/main" id="{BD001D3E-1E7F-D8CE-723F-BF071A5A060F}"/>
+              </a:ext>
+            </a:extLst>
+          </p:cNvPr>
+          <p:cNvSpPr>
+            <a:spLocks noGrp="1"/>
+          </p:cNvSpPr>
+          <p:nvPr>
+            <p:ph type="ftr" sz="quarter" idx="11"/>
+          </p:nvPr>
+        </p:nvSpPr>
+        <p:spPr/>
+        <p:txBody>
+          <a:bodyPr/>
+          <a:lstStyle/>
+          <a:p>
+            <a:r>
+              <a:rPr lang="en-US"/>
+              <a:t>© Steve Beaty and others as cited</a:t>
+            </a:r>
+          </a:p>
+        </p:txBody>
+      </p:sp>
+      <p:sp>
+        <p:nvSpPr>
+          <p:cNvPr id="6" name="Slide Number Placeholder 5">
+            <a:extLst>
+              <a:ext uri="{FF2B5EF4-FFF2-40B4-BE49-F238E27FC236}">
+                <a16:creationId xmlns:a16="http://schemas.microsoft.com/office/drawing/2014/main" id="{7B0F1EF3-D4DA-9C77-D9F9-49FC5B933C9F}"/>
+              </a:ext>
+            </a:extLst>
+          </p:cNvPr>
+          <p:cNvSpPr>
+            <a:spLocks noGrp="1"/>
+          </p:cNvSpPr>
+          <p:nvPr>
+            <p:ph type="sldNum" sz="quarter" idx="12"/>
+          </p:nvPr>
+        </p:nvSpPr>
+        <p:spPr/>
+        <p:txBody>
+          <a:bodyPr/>
+          <a:lstStyle/>
+          <a:p>
+            <a:fld id="{6CC4E492-0BB0-1D41-A747-6FED65FF6BF7}" type="slidenum">
+              <a:rPr lang="en-US" smtClean="0"/>
+              <a:t>2</a:t>
+            </a:fld>
+            <a:endParaRPr lang="en-US"/>
           </a:p>
         </p:txBody>
       </p:sp>
@@ -3057,6 +3395,92 @@
           </a:p>
         </p:txBody>
       </p:sp>
+      <p:sp>
+        <p:nvSpPr>
+          <p:cNvPr id="2" name="Date Placeholder 1">
+            <a:extLst>
+              <a:ext uri="{FF2B5EF4-FFF2-40B4-BE49-F238E27FC236}">
+                <a16:creationId xmlns:a16="http://schemas.microsoft.com/office/drawing/2014/main" id="{FB758F79-BB1F-B118-3FE6-3A155411467A}"/>
+              </a:ext>
+            </a:extLst>
+          </p:cNvPr>
+          <p:cNvSpPr>
+            <a:spLocks noGrp="1"/>
+          </p:cNvSpPr>
+          <p:nvPr>
+            <p:ph type="dt" sz="half" idx="10"/>
+          </p:nvPr>
+        </p:nvSpPr>
+        <p:spPr/>
+        <p:txBody>
+          <a:bodyPr/>
+          <a:lstStyle/>
+          <a:p>
+            <a:fld id="{43FF23A4-6E8E-5947-B229-F1E7D1EE3DDE}" type="datetime1">
+              <a:rPr lang="en-US" smtClean="0"/>
+              <a:t>10/8/26</a:t>
+            </a:fld>
+            <a:endParaRPr lang="en-US"/>
+          </a:p>
+        </p:txBody>
+      </p:sp>
+      <p:sp>
+        <p:nvSpPr>
+          <p:cNvPr id="5" name="Footer Placeholder 4">
+            <a:extLst>
+              <a:ext uri="{FF2B5EF4-FFF2-40B4-BE49-F238E27FC236}">
+                <a16:creationId xmlns:a16="http://schemas.microsoft.com/office/drawing/2014/main" id="{EBBA2F4B-1C66-9EEA-98D6-D833ABC947B5}"/>
+              </a:ext>
+            </a:extLst>
+          </p:cNvPr>
+          <p:cNvSpPr>
+            <a:spLocks noGrp="1"/>
+          </p:cNvSpPr>
+          <p:nvPr>
+            <p:ph type="ftr" sz="quarter" idx="11"/>
+          </p:nvPr>
+        </p:nvSpPr>
+        <p:spPr/>
+        <p:txBody>
+          <a:bodyPr/>
+          <a:lstStyle/>
+          <a:p>
+            <a:r>
+              <a:rPr lang="en-US"/>
+              <a:t>© Steve Beaty and others as cited</a:t>
+            </a:r>
+          </a:p>
+        </p:txBody>
+      </p:sp>
+      <p:sp>
+        <p:nvSpPr>
+          <p:cNvPr id="6" name="Slide Number Placeholder 5">
+            <a:extLst>
+              <a:ext uri="{FF2B5EF4-FFF2-40B4-BE49-F238E27FC236}">
+                <a16:creationId xmlns:a16="http://schemas.microsoft.com/office/drawing/2014/main" id="{C2877F77-9377-07E2-F020-11D2E7FC96DC}"/>
+              </a:ext>
+            </a:extLst>
+          </p:cNvPr>
+          <p:cNvSpPr>
+            <a:spLocks noGrp="1"/>
+          </p:cNvSpPr>
+          <p:nvPr>
+            <p:ph type="sldNum" sz="quarter" idx="12"/>
+          </p:nvPr>
+        </p:nvSpPr>
+        <p:spPr/>
+        <p:txBody>
+          <a:bodyPr/>
+          <a:lstStyle/>
+          <a:p>
+            <a:fld id="{6CC4E492-0BB0-1D41-A747-6FED65FF6BF7}" type="slidenum">
+              <a:rPr lang="en-US" smtClean="0"/>
+              <a:t>3</a:t>
+            </a:fld>
+            <a:endParaRPr lang="en-US"/>
+          </a:p>
+        </p:txBody>
+      </p:sp>
     </p:spTree>
     <p:extLst>
       <p:ext uri="{BB962C8B-B14F-4D97-AF65-F5344CB8AC3E}">
@@ -3501,6 +3925,92 @@
           </a:p>
           <a:p>
             <a:endParaRPr lang="en-US" dirty="0"/>
+          </a:p>
+        </p:txBody>
+      </p:sp>
+      <p:sp>
+        <p:nvSpPr>
+          <p:cNvPr id="2" name="Date Placeholder 1">
+            <a:extLst>
+              <a:ext uri="{FF2B5EF4-FFF2-40B4-BE49-F238E27FC236}">
+                <a16:creationId xmlns:a16="http://schemas.microsoft.com/office/drawing/2014/main" id="{6E38A557-97CD-08A2-EDDE-F94639B61BFF}"/>
+              </a:ext>
+            </a:extLst>
+          </p:cNvPr>
+          <p:cNvSpPr>
+            <a:spLocks noGrp="1"/>
+          </p:cNvSpPr>
+          <p:nvPr>
+            <p:ph type="dt" sz="half" idx="10"/>
+          </p:nvPr>
+        </p:nvSpPr>
+        <p:spPr/>
+        <p:txBody>
+          <a:bodyPr/>
+          <a:lstStyle/>
+          <a:p>
+            <a:fld id="{DDB9F2CC-1EEB-3B43-A8A1-0B1A11A69745}" type="datetime1">
+              <a:rPr lang="en-US" smtClean="0"/>
+              <a:t>10/8/26</a:t>
+            </a:fld>
+            <a:endParaRPr lang="en-US"/>
+          </a:p>
+        </p:txBody>
+      </p:sp>
+      <p:sp>
+        <p:nvSpPr>
+          <p:cNvPr id="5" name="Footer Placeholder 4">
+            <a:extLst>
+              <a:ext uri="{FF2B5EF4-FFF2-40B4-BE49-F238E27FC236}">
+                <a16:creationId xmlns:a16="http://schemas.microsoft.com/office/drawing/2014/main" id="{8E12C937-6343-5068-F166-63BAABB00F7E}"/>
+              </a:ext>
+            </a:extLst>
+          </p:cNvPr>
+          <p:cNvSpPr>
+            <a:spLocks noGrp="1"/>
+          </p:cNvSpPr>
+          <p:nvPr>
+            <p:ph type="ftr" sz="quarter" idx="11"/>
+          </p:nvPr>
+        </p:nvSpPr>
+        <p:spPr/>
+        <p:txBody>
+          <a:bodyPr/>
+          <a:lstStyle/>
+          <a:p>
+            <a:r>
+              <a:rPr lang="en-US"/>
+              <a:t>© Steve Beaty and others as cited</a:t>
+            </a:r>
+          </a:p>
+        </p:txBody>
+      </p:sp>
+      <p:sp>
+        <p:nvSpPr>
+          <p:cNvPr id="6" name="Slide Number Placeholder 5">
+            <a:extLst>
+              <a:ext uri="{FF2B5EF4-FFF2-40B4-BE49-F238E27FC236}">
+                <a16:creationId xmlns:a16="http://schemas.microsoft.com/office/drawing/2014/main" id="{013E20D0-1CA2-3193-C037-9527B67C79C2}"/>
+              </a:ext>
+            </a:extLst>
+          </p:cNvPr>
+          <p:cNvSpPr>
+            <a:spLocks noGrp="1"/>
+          </p:cNvSpPr>
+          <p:nvPr>
+            <p:ph type="sldNum" sz="quarter" idx="12"/>
+          </p:nvPr>
+        </p:nvSpPr>
+        <p:spPr/>
+        <p:txBody>
+          <a:bodyPr/>
+          <a:lstStyle/>
+          <a:p>
+            <a:fld id="{6CC4E492-0BB0-1D41-A747-6FED65FF6BF7}" type="slidenum">
+              <a:rPr lang="en-US" smtClean="0"/>
+              <a:t>4</a:t>
+            </a:fld>
+            <a:endParaRPr lang="en-US"/>
           </a:p>
         </p:txBody>
       </p:sp>
@@ -3848,7 +4358,322 @@
   <a:extraClrSchemeLst/>
   <a:extLst>
     <a:ext uri="{05A4C25C-085E-4340-85A3-A5531E510DB2}">
-      <thm15:themeFamily xmlns:thm15="http://schemas.microsoft.com/office/thememl/2012/main" name="Chapter01.pptx" id="{85C1B3FA-0721-D54A-A73A-184B6A338229}" vid="{92464662-74CA-944C-95EE-729496A6E2DB}"/>
+      <thm15:themeFamily xmlns:thm15="http://schemas.microsoft.com/office/thememl/2012/main" name="Presentation1" id="{9DA9736E-330F-4D40-A0AF-1CC780C29072}" vid="{881790AE-4280-6941-9F6C-19A6C408C41E}"/>
+    </a:ext>
+  </a:extLst>
+</a:theme>
+</file>
+
+<file path=ppt/theme/theme2.xml><?xml version="1.0" encoding="utf-8"?>
+<a:theme xmlns:a="http://schemas.openxmlformats.org/drawingml/2006/main" name="Office Theme">
+  <a:themeElements>
+    <a:clrScheme name="Office">
+      <a:dk1>
+        <a:sysClr val="windowText" lastClr="000000"/>
+      </a:dk1>
+      <a:lt1>
+        <a:sysClr val="window" lastClr="FFFFFF"/>
+      </a:lt1>
+      <a:dk2>
+        <a:srgbClr val="0E2841"/>
+      </a:dk2>
+      <a:lt2>
+        <a:srgbClr val="E8E8E8"/>
+      </a:lt2>
+      <a:accent1>
+        <a:srgbClr val="156082"/>
+      </a:accent1>
+      <a:accent2>
+        <a:srgbClr val="E97132"/>
+      </a:accent2>
+      <a:accent3>
+        <a:srgbClr val="196B24"/>
+      </a:accent3>
+      <a:accent4>
+        <a:srgbClr val="0F9ED5"/>
+      </a:accent4>
+      <a:accent5>
+        <a:srgbClr val="A02B93"/>
+      </a:accent5>
+      <a:accent6>
+        <a:srgbClr val="4EA72E"/>
+      </a:accent6>
+      <a:hlink>
+        <a:srgbClr val="467886"/>
+      </a:hlink>
+      <a:folHlink>
+        <a:srgbClr val="96607D"/>
+      </a:folHlink>
+    </a:clrScheme>
+    <a:fontScheme name="Office">
+      <a:majorFont>
+        <a:latin typeface="Aptos Display" panose="02110004020202020204"/>
+        <a:ea typeface=""/>
+        <a:cs typeface=""/>
+        <a:font script="Jpan" typeface="游ゴシック Light"/>
+        <a:font script="Hang" typeface="맑은 고딕"/>
+        <a:font script="Hans" typeface="等线 Light"/>
+        <a:font script="Hant" typeface="新細明體"/>
+        <a:font script="Arab" typeface="Times New Roman"/>
+        <a:font script="Hebr" typeface="Times New Roman"/>
+        <a:font script="Thai" typeface="Angsana New"/>
+        <a:font script="Ethi" typeface="Nyala"/>
+        <a:font script="Beng" typeface="Vrinda"/>
+        <a:font script="Gujr" typeface="Shruti"/>
+        <a:font script="Khmr" typeface="MoolBoran"/>
+        <a:font script="Knda" typeface="Tunga"/>
+        <a:font script="Guru" typeface="Raavi"/>
+        <a:font script="Cans" typeface="Euphemia"/>
+        <a:font script="Cher" typeface="Plantagenet Cherokee"/>
+        <a:font script="Yiii" typeface="Microsoft Yi Baiti"/>
+        <a:font script="Tibt" typeface="Microsoft Himalaya"/>
+        <a:font script="Thaa" typeface="MV Boli"/>
+        <a:font script="Deva" typeface="Mangal"/>
+        <a:font script="Telu" typeface="Gautami"/>
+        <a:font script="Taml" typeface="Latha"/>
+        <a:font script="Syrc" typeface="Estrangelo Edessa"/>
+        <a:font script="Orya" typeface="Kalinga"/>
+        <a:font script="Mlym" typeface="Kartika"/>
+        <a:font script="Laoo" typeface="DokChampa"/>
+        <a:font script="Sinh" typeface="Iskoola Pota"/>
+        <a:font script="Mong" typeface="Mongolian Baiti"/>
+        <a:font script="Viet" typeface="Times New Roman"/>
+        <a:font script="Uigh" typeface="Microsoft Uighur"/>
+        <a:font script="Geor" typeface="Sylfaen"/>
+        <a:font script="Armn" typeface="Arial"/>
+        <a:font script="Bugi" typeface="Leelawadee UI"/>
+        <a:font script="Bopo" typeface="Microsoft JhengHei"/>
+        <a:font script="Java" typeface="Javanese Text"/>
+        <a:font script="Lisu" typeface="Segoe UI"/>
+        <a:font script="Mymr" typeface="Myanmar Text"/>
+        <a:font script="Nkoo" typeface="Ebrima"/>
+        <a:font script="Olck" typeface="Nirmala UI"/>
+        <a:font script="Osma" typeface="Ebrima"/>
+        <a:font script="Phag" typeface="Phagspa"/>
+        <a:font script="Syrn" typeface="Estrangelo Edessa"/>
+        <a:font script="Syrj" typeface="Estrangelo Edessa"/>
+        <a:font script="Syre" typeface="Estrangelo Edessa"/>
+        <a:font script="Sora" typeface="Nirmala UI"/>
+        <a:font script="Tale" typeface="Microsoft Tai Le"/>
+        <a:font script="Talu" typeface="Microsoft New Tai Lue"/>
+        <a:font script="Tfng" typeface="Ebrima"/>
+      </a:majorFont>
+      <a:minorFont>
+        <a:latin typeface="Aptos" panose="02110004020202020204"/>
+        <a:ea typeface=""/>
+        <a:cs typeface=""/>
+        <a:font script="Jpan" typeface="游ゴシック"/>
+        <a:font script="Hang" typeface="맑은 고딕"/>
+        <a:font script="Hans" typeface="等线"/>
+        <a:font script="Hant" typeface="新細明體"/>
+        <a:font script="Arab" typeface="Arial"/>
+        <a:font script="Hebr" typeface="Arial"/>
+        <a:font script="Thai" typeface="Cordia New"/>
+        <a:font script="Ethi" typeface="Nyala"/>
+        <a:font script="Beng" typeface="Vrinda"/>
+        <a:font script="Gujr" typeface="Shruti"/>
+        <a:font script="Khmr" typeface="DaunPenh"/>
+        <a:font script="Knda" typeface="Tunga"/>
+        <a:font script="Guru" typeface="Raavi"/>
+        <a:font script="Cans" typeface="Euphemia"/>
+        <a:font script="Cher" typeface="Plantagenet Cherokee"/>
+        <a:font script="Yiii" typeface="Microsoft Yi Baiti"/>
+        <a:font script="Tibt" typeface="Microsoft Himalaya"/>
+        <a:font script="Thaa" typeface="MV Boli"/>
+        <a:font script="Deva" typeface="Mangal"/>
+        <a:font script="Telu" typeface="Gautami"/>
+        <a:font script="Taml" typeface="Latha"/>
+        <a:font script="Syrc" typeface="Estrangelo Edessa"/>
+        <a:font script="Orya" typeface="Kalinga"/>
+        <a:font script="Mlym" typeface="Kartika"/>
+        <a:font script="Laoo" typeface="DokChampa"/>
+        <a:font script="Sinh" typeface="Iskoola Pota"/>
+        <a:font script="Mong" typeface="Mongolian Baiti"/>
+        <a:font script="Viet" typeface="Arial"/>
+        <a:font script="Uigh" typeface="Microsoft Uighur"/>
+        <a:font script="Geor" typeface="Sylfaen"/>
+        <a:font script="Armn" typeface="Arial"/>
+        <a:font script="Bugi" typeface="Leelawadee UI"/>
+        <a:font script="Bopo" typeface="Microsoft JhengHei"/>
+        <a:font script="Java" typeface="Javanese Text"/>
+        <a:font script="Lisu" typeface="Segoe UI"/>
+        <a:font script="Mymr" typeface="Myanmar Text"/>
+        <a:font script="Nkoo" typeface="Ebrima"/>
+        <a:font script="Olck" typeface="Nirmala UI"/>
+        <a:font script="Osma" typeface="Ebrima"/>
+        <a:font script="Phag" typeface="Phagspa"/>
+        <a:font script="Syrn" typeface="Estrangelo Edessa"/>
+        <a:font script="Syrj" typeface="Estrangelo Edessa"/>
+        <a:font script="Syre" typeface="Estrangelo Edessa"/>
+        <a:font script="Sora" typeface="Nirmala UI"/>
+        <a:font script="Tale" typeface="Microsoft Tai Le"/>
+        <a:font script="Talu" typeface="Microsoft New Tai Lue"/>
+        <a:font script="Tfng" typeface="Ebrima"/>
+      </a:minorFont>
+    </a:fontScheme>
+    <a:fmtScheme name="Office">
+      <a:fillStyleLst>
+        <a:solidFill>
+          <a:schemeClr val="phClr"/>
+        </a:solidFill>
+        <a:gradFill rotWithShape="1">
+          <a:gsLst>
+            <a:gs pos="0">
+              <a:schemeClr val="phClr">
+                <a:lumMod val="110000"/>
+                <a:satMod val="105000"/>
+                <a:tint val="67000"/>
+              </a:schemeClr>
+            </a:gs>
+            <a:gs pos="50000">
+              <a:schemeClr val="phClr">
+                <a:lumMod val="105000"/>
+                <a:satMod val="103000"/>
+                <a:tint val="73000"/>
+              </a:schemeClr>
+            </a:gs>
+            <a:gs pos="100000">
+              <a:schemeClr val="phClr">
+                <a:lumMod val="105000"/>
+                <a:satMod val="109000"/>
+                <a:tint val="81000"/>
+              </a:schemeClr>
+            </a:gs>
+          </a:gsLst>
+          <a:lin ang="5400000" scaled="0"/>
+        </a:gradFill>
+        <a:gradFill rotWithShape="1">
+          <a:gsLst>
+            <a:gs pos="0">
+              <a:schemeClr val="phClr">
+                <a:satMod val="103000"/>
+                <a:lumMod val="102000"/>
+                <a:tint val="94000"/>
+              </a:schemeClr>
+            </a:gs>
+            <a:gs pos="50000">
+              <a:schemeClr val="phClr">
+                <a:satMod val="110000"/>
+                <a:lumMod val="100000"/>
+                <a:shade val="100000"/>
+              </a:schemeClr>
+            </a:gs>
+            <a:gs pos="100000">
+              <a:schemeClr val="phClr">
+                <a:lumMod val="99000"/>
+                <a:satMod val="120000"/>
+                <a:shade val="78000"/>
+              </a:schemeClr>
+            </a:gs>
+          </a:gsLst>
+          <a:lin ang="5400000" scaled="0"/>
+        </a:gradFill>
+      </a:fillStyleLst>
+      <a:lnStyleLst>
+        <a:ln w="12700" cap="flat" cmpd="sng" algn="ctr">
+          <a:solidFill>
+            <a:schemeClr val="phClr"/>
+          </a:solidFill>
+          <a:prstDash val="solid"/>
+          <a:miter lim="800000"/>
+        </a:ln>
+        <a:ln w="19050" cap="flat" cmpd="sng" algn="ctr">
+          <a:solidFill>
+            <a:schemeClr val="phClr"/>
+          </a:solidFill>
+          <a:prstDash val="solid"/>
+          <a:miter lim="800000"/>
+        </a:ln>
+        <a:ln w="25400" cap="flat" cmpd="sng" algn="ctr">
+          <a:solidFill>
+            <a:schemeClr val="phClr"/>
+          </a:solidFill>
+          <a:prstDash val="solid"/>
+          <a:miter lim="800000"/>
+        </a:ln>
+      </a:lnStyleLst>
+      <a:effectStyleLst>
+        <a:effectStyle>
+          <a:effectLst/>
+        </a:effectStyle>
+        <a:effectStyle>
+          <a:effectLst/>
+        </a:effectStyle>
+        <a:effectStyle>
+          <a:effectLst>
+            <a:outerShdw blurRad="57150" dist="19050" dir="5400000" algn="ctr" rotWithShape="0">
+              <a:srgbClr val="000000">
+                <a:alpha val="63000"/>
+              </a:srgbClr>
+            </a:outerShdw>
+          </a:effectLst>
+        </a:effectStyle>
+      </a:effectStyleLst>
+      <a:bgFillStyleLst>
+        <a:solidFill>
+          <a:schemeClr val="phClr"/>
+        </a:solidFill>
+        <a:solidFill>
+          <a:schemeClr val="phClr">
+            <a:tint val="95000"/>
+            <a:satMod val="170000"/>
+          </a:schemeClr>
+        </a:solidFill>
+        <a:gradFill rotWithShape="1">
+          <a:gsLst>
+            <a:gs pos="0">
+              <a:schemeClr val="phClr">
+                <a:tint val="93000"/>
+                <a:satMod val="150000"/>
+                <a:shade val="98000"/>
+                <a:lumMod val="102000"/>
+              </a:schemeClr>
+            </a:gs>
+            <a:gs pos="50000">
+              <a:schemeClr val="phClr">
+                <a:tint val="98000"/>
+                <a:satMod val="130000"/>
+                <a:shade val="90000"/>
+                <a:lumMod val="103000"/>
+              </a:schemeClr>
+            </a:gs>
+            <a:gs pos="100000">
+              <a:schemeClr val="phClr">
+                <a:shade val="63000"/>
+                <a:satMod val="120000"/>
+              </a:schemeClr>
+            </a:gs>
+          </a:gsLst>
+          <a:lin ang="5400000" scaled="0"/>
+        </a:gradFill>
+      </a:bgFillStyleLst>
+    </a:fmtScheme>
+  </a:themeElements>
+  <a:objectDefaults>
+    <a:lnDef>
+      <a:spPr/>
+      <a:bodyPr/>
+      <a:lstStyle/>
+      <a:style>
+        <a:lnRef idx="2">
+          <a:schemeClr val="accent1"/>
+        </a:lnRef>
+        <a:fillRef idx="0">
+          <a:schemeClr val="accent1"/>
+        </a:fillRef>
+        <a:effectRef idx="1">
+          <a:schemeClr val="accent1"/>
+        </a:effectRef>
+        <a:fontRef idx="minor">
+          <a:schemeClr val="tx1"/>
+        </a:fontRef>
+      </a:style>
+    </a:lnDef>
+  </a:objectDefaults>
+  <a:extraClrSchemeLst/>
+  <a:extLst>
+    <a:ext uri="{05A4C25C-085E-4340-85A3-A5531E510DB2}">
+      <thm15:themeFamily xmlns:thm15="http://schemas.microsoft.com/office/thememl/2012/main" name="Office Theme" id="{2E142A2C-CD16-42D6-873A-C26D2A0506FA}" vid="{1BDDFF52-6CD6-40A5-AB3C-68EB2F1E4D0A}"/>
     </a:ext>
   </a:extLst>
 </a:theme>
